--- a/Presentations/Module_8_MVVM_Toolkit_Presentation.pptx
+++ b/Presentations/Module_8_MVVM_Toolkit_Presentation.pptx
@@ -2,23 +2,26 @@
 <file path=ppt/presentation.xml><?xml version="1.0" encoding="utf-8"?>
 <p:presentation xmlns:p="http://schemas.openxmlformats.org/presentationml/2006/main">
   <p:sldMasterIdLst>
-    <p:sldMasterId xmlns:r="http://schemas.openxmlformats.org/officeDocument/2006/relationships" id="2147483648" r:id="Re8cf4f725c1240b6"/>
+    <p:sldMasterId xmlns:r="http://schemas.openxmlformats.org/officeDocument/2006/relationships" id="2147483648" r:id="R623990300352455c"/>
   </p:sldMasterIdLst>
   <p:notesMasterIdLst>
-    <p:notesMasterId xmlns:r="http://schemas.openxmlformats.org/officeDocument/2006/relationships" r:id="R7eeb0d9975a04d70"/>
+    <p:notesMasterId xmlns:r="http://schemas.openxmlformats.org/officeDocument/2006/relationships" r:id="Re6e804bc317d401f"/>
   </p:notesMasterIdLst>
   <p:sldIdLst>
-    <p:sldId xmlns:r="http://schemas.openxmlformats.org/officeDocument/2006/relationships" id="256" r:id="Rbc65f9657eed47e7"/>
-    <p:sldId xmlns:r="http://schemas.openxmlformats.org/officeDocument/2006/relationships" id="257" r:id="R556d6b3902834bdb"/>
-    <p:sldId xmlns:r="http://schemas.openxmlformats.org/officeDocument/2006/relationships" id="258" r:id="R78ada84a96b746aa"/>
-    <p:sldId xmlns:r="http://schemas.openxmlformats.org/officeDocument/2006/relationships" id="259" r:id="Rea3cc4d49c374cbb"/>
-    <p:sldId xmlns:r="http://schemas.openxmlformats.org/officeDocument/2006/relationships" id="260" r:id="R48de3fb2d91841b7"/>
-    <p:sldId xmlns:r="http://schemas.openxmlformats.org/officeDocument/2006/relationships" id="261" r:id="R0e128f9b7b5e4980"/>
-    <p:sldId xmlns:r="http://schemas.openxmlformats.org/officeDocument/2006/relationships" id="262" r:id="R211b7a66364743da"/>
-    <p:sldId xmlns:r="http://schemas.openxmlformats.org/officeDocument/2006/relationships" id="263" r:id="Rca34115bd32e4f41"/>
-    <p:sldId xmlns:r="http://schemas.openxmlformats.org/officeDocument/2006/relationships" id="264" r:id="R1c3cbe3d1a7b4691"/>
-    <p:sldId xmlns:r="http://schemas.openxmlformats.org/officeDocument/2006/relationships" id="265" r:id="Rcb5aeac3efeb41fa"/>
-    <p:sldId xmlns:r="http://schemas.openxmlformats.org/officeDocument/2006/relationships" id="266" r:id="Rac10231ffb2442c6"/>
+    <p:sldId xmlns:r="http://schemas.openxmlformats.org/officeDocument/2006/relationships" id="256" r:id="R40dc793462134cce"/>
+    <p:sldId xmlns:r="http://schemas.openxmlformats.org/officeDocument/2006/relationships" id="257" r:id="R8dc40f4be38b4a26"/>
+    <p:sldId xmlns:r="http://schemas.openxmlformats.org/officeDocument/2006/relationships" id="258" r:id="R2365af3de8ca497f"/>
+    <p:sldId xmlns:r="http://schemas.openxmlformats.org/officeDocument/2006/relationships" id="259" r:id="Rdc2942f17d6a4bb3"/>
+    <p:sldId xmlns:r="http://schemas.openxmlformats.org/officeDocument/2006/relationships" id="260" r:id="Rd25e056819bf4b51"/>
+    <p:sldId xmlns:r="http://schemas.openxmlformats.org/officeDocument/2006/relationships" id="261" r:id="R0c08b0547cd24e31"/>
+    <p:sldId xmlns:r="http://schemas.openxmlformats.org/officeDocument/2006/relationships" id="262" r:id="R0ddd6ae1ece5448a"/>
+    <p:sldId xmlns:r="http://schemas.openxmlformats.org/officeDocument/2006/relationships" id="263" r:id="Rffff3f9b057349fc"/>
+    <p:sldId xmlns:r="http://schemas.openxmlformats.org/officeDocument/2006/relationships" id="264" r:id="R7b56c856ecff4ab8"/>
+    <p:sldId xmlns:r="http://schemas.openxmlformats.org/officeDocument/2006/relationships" id="265" r:id="R4273aea360cd4718"/>
+    <p:sldId xmlns:r="http://schemas.openxmlformats.org/officeDocument/2006/relationships" id="266" r:id="Raeed34423e04431b"/>
+    <p:sldId xmlns:r="http://schemas.openxmlformats.org/officeDocument/2006/relationships" id="267" r:id="R976cfc2a31e341f2"/>
+    <p:sldId xmlns:r="http://schemas.openxmlformats.org/officeDocument/2006/relationships" id="268" r:id="Rb1cf00d5bd734a16"/>
+    <p:sldId xmlns:r="http://schemas.openxmlformats.org/officeDocument/2006/relationships" id="269" r:id="Rd93ff1f4a6d8470a"/>
   </p:sldIdLst>
   <p:sldSz cx="12192000" cy="6858000"/>
   <p:notesSz cx="6858000" cy="9144000"/>
@@ -579,7 +582,7 @@
           <a:lstStyle xmlns:a="http://schemas.openxmlformats.org/drawingml/2006/main"/>
           <a:p xmlns:a="http://schemas.openxmlformats.org/drawingml/2006/main">
             <a:r>
-              <a:t>Introduce Module 8. Open the matching Word tutorial after the exercise overview.</a:t>
+              <a:t>Open the matching Word tutorial after the exercise overview. Source: Module 8 Word tutorial.</a:t>
             </a:r>
           </a:p>
         </p:txBody>
@@ -649,7 +652,7 @@
           <a:lstStyle xmlns:a="http://schemas.openxmlformats.org/drawingml/2006/main"/>
           <a:p xmlns:a="http://schemas.openxmlformats.org/drawingml/2006/main">
             <a:r>
-              <a:t>After tutorial Step 4: run the app or inspect the code. Ask students to explain the observed result. Source: Module 8 Word tutorial.</a:t>
+              <a:t>After tutorial Step 3: run the app or inspect the code. Ask students to explain the observed result. Source: Module 8 Word tutorial.</a:t>
             </a:r>
           </a:p>
         </p:txBody>
@@ -719,7 +722,217 @@
           <a:lstStyle xmlns:a="http://schemas.openxmlformats.org/drawingml/2006/main"/>
           <a:p xmlns:a="http://schemas.openxmlformats.org/drawingml/2006/main">
             <a:r>
+              <a:t>Before tutorial Step 4: explain these concepts. Ask students to predict what the change will do. Then open Step 4 in the Word tutorial. Source: Module 8 Word tutorial. Related MAUI documentation: https://learn.microsoft.com/dotnet/communitytoolkit/mvvm/generators/overview</a:t>
+            </a:r>
+          </a:p>
+        </p:txBody>
+      </p:sp>
+      <p:sp>
+        <p:nvSpPr>
+          <p:cNvPr id="4" name="Slide Number Placeholder 3"/>
+          <p:cNvSpPr>
+            <a:spLocks xmlns:a="http://schemas.openxmlformats.org/drawingml/2006/main" noGrp="1"/>
+          </p:cNvSpPr>
+          <p:nvPr>
+            <p:ph type="sldNum" idx="5"/>
+          </p:nvPr>
+        </p:nvSpPr>
+        <p:spPr/>
+        <p:txBody>
+          <a:bodyPr xmlns:a="http://schemas.openxmlformats.org/drawingml/2006/main"/>
+          <a:lstStyle xmlns:a="http://schemas.openxmlformats.org/drawingml/2006/main"/>
+          <a:p xmlns:a="http://schemas.openxmlformats.org/drawingml/2006/main"/>
+        </p:txBody>
+      </p:sp>
+    </p:spTree>
+  </p:cSld>
+  <p:clrMapOvr>
+    <a:masterClrMapping xmlns:a="http://schemas.openxmlformats.org/drawingml/2006/main"/>
+  </p:clrMapOvr>
+</p:notes>
+</file>
+
+<file path=ppt/notesSlides/notesSlide12.xml><?xml version="1.0" encoding="utf-8"?>
+<p:notes xmlns:p="http://schemas.openxmlformats.org/presentationml/2006/main">
+  <p:cSld>
+    <p:spTree>
+      <p:nvGrpSpPr>
+        <p:cNvPr id="1" name=""/>
+        <p:cNvGrpSpPr/>
+        <p:nvPr/>
+      </p:nvGrpSpPr>
+      <p:grpSpPr>
+        <a:xfrm xmlns:a="http://schemas.openxmlformats.org/drawingml/2006/main"/>
+      </p:grpSpPr>
+      <p:sp>
+        <p:nvSpPr>
+          <p:cNvPr id="2" name="Slide Image Placeholder 1"/>
+          <p:cNvSpPr>
+            <a:spLocks xmlns:a="http://schemas.openxmlformats.org/drawingml/2006/main" noGrp="1"/>
+          </p:cNvSpPr>
+          <p:nvPr>
+            <p:ph type="sldImg" idx="0"/>
+          </p:nvPr>
+        </p:nvSpPr>
+        <p:spPr/>
+      </p:sp>
+      <p:sp>
+        <p:nvSpPr>
+          <p:cNvPr id="3" name="Notes Placeholder 2"/>
+          <p:cNvSpPr>
+            <a:spLocks xmlns:a="http://schemas.openxmlformats.org/drawingml/2006/main" noGrp="1"/>
+          </p:cNvSpPr>
+          <p:nvPr>
+            <p:ph type="body" idx="1"/>
+          </p:nvPr>
+        </p:nvSpPr>
+        <p:spPr/>
+        <p:txBody>
+          <a:bodyPr xmlns:a="http://schemas.openxmlformats.org/drawingml/2006/main"/>
+          <a:lstStyle xmlns:a="http://schemas.openxmlformats.org/drawingml/2006/main"/>
+          <a:p xmlns:a="http://schemas.openxmlformats.org/drawingml/2006/main">
+            <a:r>
+              <a:t>After tutorial Step 4: run the app or inspect the code. Ask students to explain the observed result. Source: Module 8 Word tutorial.</a:t>
+            </a:r>
+          </a:p>
+        </p:txBody>
+      </p:sp>
+      <p:sp>
+        <p:nvSpPr>
+          <p:cNvPr id="4" name="Slide Number Placeholder 3"/>
+          <p:cNvSpPr>
+            <a:spLocks xmlns:a="http://schemas.openxmlformats.org/drawingml/2006/main" noGrp="1"/>
+          </p:cNvSpPr>
+          <p:nvPr>
+            <p:ph type="sldNum" idx="5"/>
+          </p:nvPr>
+        </p:nvSpPr>
+        <p:spPr/>
+        <p:txBody>
+          <a:bodyPr xmlns:a="http://schemas.openxmlformats.org/drawingml/2006/main"/>
+          <a:lstStyle xmlns:a="http://schemas.openxmlformats.org/drawingml/2006/main"/>
+          <a:p xmlns:a="http://schemas.openxmlformats.org/drawingml/2006/main"/>
+        </p:txBody>
+      </p:sp>
+    </p:spTree>
+  </p:cSld>
+  <p:clrMapOvr>
+    <a:masterClrMapping xmlns:a="http://schemas.openxmlformats.org/drawingml/2006/main"/>
+  </p:clrMapOvr>
+</p:notes>
+</file>
+
+<file path=ppt/notesSlides/notesSlide13.xml><?xml version="1.0" encoding="utf-8"?>
+<p:notes xmlns:p="http://schemas.openxmlformats.org/presentationml/2006/main">
+  <p:cSld>
+    <p:spTree>
+      <p:nvGrpSpPr>
+        <p:cNvPr id="1" name=""/>
+        <p:cNvGrpSpPr/>
+        <p:nvPr/>
+      </p:nvGrpSpPr>
+      <p:grpSpPr>
+        <a:xfrm xmlns:a="http://schemas.openxmlformats.org/drawingml/2006/main"/>
+      </p:grpSpPr>
+      <p:sp>
+        <p:nvSpPr>
+          <p:cNvPr id="2" name="Slide Image Placeholder 1"/>
+          <p:cNvSpPr>
+            <a:spLocks xmlns:a="http://schemas.openxmlformats.org/drawingml/2006/main" noGrp="1"/>
+          </p:cNvSpPr>
+          <p:nvPr>
+            <p:ph type="sldImg" idx="0"/>
+          </p:nvPr>
+        </p:nvSpPr>
+        <p:spPr/>
+      </p:sp>
+      <p:sp>
+        <p:nvSpPr>
+          <p:cNvPr id="3" name="Notes Placeholder 2"/>
+          <p:cNvSpPr>
+            <a:spLocks xmlns:a="http://schemas.openxmlformats.org/drawingml/2006/main" noGrp="1"/>
+          </p:cNvSpPr>
+          <p:nvPr>
+            <p:ph type="body" idx="1"/>
+          </p:nvPr>
+        </p:nvSpPr>
+        <p:spPr/>
+        <p:txBody>
+          <a:bodyPr xmlns:a="http://schemas.openxmlformats.org/drawingml/2006/main"/>
+          <a:lstStyle xmlns:a="http://schemas.openxmlformats.org/drawingml/2006/main"/>
+          <a:p xmlns:a="http://schemas.openxmlformats.org/drawingml/2006/main">
+            <a:r>
               <a:t>Use the final tutorial checklist. Ask students to explain the module concept without reading code. Source: Module 8 Word tutorial.</a:t>
+            </a:r>
+          </a:p>
+        </p:txBody>
+      </p:sp>
+      <p:sp>
+        <p:nvSpPr>
+          <p:cNvPr id="4" name="Slide Number Placeholder 3"/>
+          <p:cNvSpPr>
+            <a:spLocks xmlns:a="http://schemas.openxmlformats.org/drawingml/2006/main" noGrp="1"/>
+          </p:cNvSpPr>
+          <p:nvPr>
+            <p:ph type="sldNum" idx="5"/>
+          </p:nvPr>
+        </p:nvSpPr>
+        <p:spPr/>
+        <p:txBody>
+          <a:bodyPr xmlns:a="http://schemas.openxmlformats.org/drawingml/2006/main"/>
+          <a:lstStyle xmlns:a="http://schemas.openxmlformats.org/drawingml/2006/main"/>
+          <a:p xmlns:a="http://schemas.openxmlformats.org/drawingml/2006/main"/>
+        </p:txBody>
+      </p:sp>
+    </p:spTree>
+  </p:cSld>
+  <p:clrMapOvr>
+    <a:masterClrMapping xmlns:a="http://schemas.openxmlformats.org/drawingml/2006/main"/>
+  </p:clrMapOvr>
+</p:notes>
+</file>
+
+<file path=ppt/notesSlides/notesSlide14.xml><?xml version="1.0" encoding="utf-8"?>
+<p:notes xmlns:p="http://schemas.openxmlformats.org/presentationml/2006/main">
+  <p:cSld>
+    <p:spTree>
+      <p:nvGrpSpPr>
+        <p:cNvPr id="1" name=""/>
+        <p:cNvGrpSpPr/>
+        <p:nvPr/>
+      </p:nvGrpSpPr>
+      <p:grpSpPr>
+        <a:xfrm xmlns:a="http://schemas.openxmlformats.org/drawingml/2006/main"/>
+      </p:grpSpPr>
+      <p:sp>
+        <p:nvSpPr>
+          <p:cNvPr id="2" name="Slide Image Placeholder 1"/>
+          <p:cNvSpPr>
+            <a:spLocks xmlns:a="http://schemas.openxmlformats.org/drawingml/2006/main" noGrp="1"/>
+          </p:cNvSpPr>
+          <p:nvPr>
+            <p:ph type="sldImg" idx="0"/>
+          </p:nvPr>
+        </p:nvSpPr>
+        <p:spPr/>
+      </p:sp>
+      <p:sp>
+        <p:nvSpPr>
+          <p:cNvPr id="3" name="Notes Placeholder 2"/>
+          <p:cNvSpPr>
+            <a:spLocks xmlns:a="http://schemas.openxmlformats.org/drawingml/2006/main" noGrp="1"/>
+          </p:cNvSpPr>
+          <p:nvPr>
+            <p:ph type="body" idx="1"/>
+          </p:nvPr>
+        </p:nvSpPr>
+        <p:spPr/>
+        <p:txBody>
+          <a:bodyPr xmlns:a="http://schemas.openxmlformats.org/drawingml/2006/main"/>
+          <a:lstStyle xmlns:a="http://schemas.openxmlformats.org/drawingml/2006/main"/>
+          <a:p xmlns:a="http://schemas.openxmlformats.org/drawingml/2006/main">
+            <a:r>
+              <a:t>Student reading: MVVM Toolkit generators. https://learn.microsoft.com/dotnet/communitytoolkit/mvvm/generators/overview</a:t>
             </a:r>
           </a:p>
         </p:txBody>
@@ -789,7 +1002,7 @@
           <a:lstStyle xmlns:a="http://schemas.openxmlformats.org/drawingml/2006/main"/>
           <a:p xmlns:a="http://schemas.openxmlformats.org/drawingml/2006/main">
             <a:r>
-              <a:t>Explain the work for Module 8. Show the expected app result before students start. Source: Module 8 Word tutorial.</a:t>
+              <a:t>Give students the outcome before they start. Source: Module 8 Word tutorial.</a:t>
             </a:r>
           </a:p>
         </p:txBody>
@@ -859,7 +1072,7 @@
           <a:lstStyle xmlns:a="http://schemas.openxmlformats.org/drawingml/2006/main"/>
           <a:p xmlns:a="http://schemas.openxmlformats.org/drawingml/2006/main">
             <a:r>
-              <a:t>Before tutorial Step 1: explain these concepts. Ask students to predict what the change will do. Then open Step 1 in the Word tutorial. Source: Module 8 Word tutorial.</a:t>
+              <a:t>Explain the framework idea before the first exercise step. MAUI documentation: https://learn.microsoft.com/dotnet/communitytoolkit/mvvm/generators/overview</a:t>
             </a:r>
           </a:p>
         </p:txBody>
@@ -929,7 +1142,7 @@
           <a:lstStyle xmlns:a="http://schemas.openxmlformats.org/drawingml/2006/main"/>
           <a:p xmlns:a="http://schemas.openxmlformats.org/drawingml/2006/main">
             <a:r>
-              <a:t>After tutorial Step 1: run the app or inspect the code. Ask students to explain the observed result. Source: Module 8 Word tutorial.</a:t>
+              <a:t>Ask students to identify the C# object, the XAML control, and the connection between them. Source: Module 8 Word tutorial. MAUI documentation: https://learn.microsoft.com/dotnet/communitytoolkit/mvvm/generators/overview</a:t>
             </a:r>
           </a:p>
         </p:txBody>
@@ -999,7 +1212,7 @@
           <a:lstStyle xmlns:a="http://schemas.openxmlformats.org/drawingml/2006/main"/>
           <a:p xmlns:a="http://schemas.openxmlformats.org/drawingml/2006/main">
             <a:r>
-              <a:t>Before tutorial Step 2: explain these concepts. Ask students to predict what the change will do. Then open Step 2 in the Word tutorial. Source: Module 8 Word tutorial.</a:t>
+              <a:t>Before tutorial Step 1: explain these concepts. Ask students to predict what the change will do. Then open Step 1 in the Word tutorial. Source: Module 8 Word tutorial. Related MAUI documentation: https://learn.microsoft.com/dotnet/communitytoolkit/mvvm/generators/overview</a:t>
             </a:r>
           </a:p>
         </p:txBody>
@@ -1069,7 +1282,7 @@
           <a:lstStyle xmlns:a="http://schemas.openxmlformats.org/drawingml/2006/main"/>
           <a:p xmlns:a="http://schemas.openxmlformats.org/drawingml/2006/main">
             <a:r>
-              <a:t>After tutorial Step 2: run the app or inspect the code. Ask students to explain the observed result. Source: Module 8 Word tutorial.</a:t>
+              <a:t>After tutorial Step 1: run the app or inspect the code. Ask students to explain the observed result. Source: Module 8 Word tutorial.</a:t>
             </a:r>
           </a:p>
         </p:txBody>
@@ -1139,7 +1352,7 @@
           <a:lstStyle xmlns:a="http://schemas.openxmlformats.org/drawingml/2006/main"/>
           <a:p xmlns:a="http://schemas.openxmlformats.org/drawingml/2006/main">
             <a:r>
-              <a:t>Before tutorial Step 3: explain these concepts. Ask students to predict what the change will do. Then open Step 3 in the Word tutorial. Source: Module 8 Word tutorial.</a:t>
+              <a:t>Before tutorial Step 2: explain these concepts. Ask students to predict what the change will do. Then open Step 2 in the Word tutorial. Source: Module 8 Word tutorial. Related MAUI documentation: https://learn.microsoft.com/dotnet/communitytoolkit/mvvm/generators/overview</a:t>
             </a:r>
           </a:p>
         </p:txBody>
@@ -1209,7 +1422,7 @@
           <a:lstStyle xmlns:a="http://schemas.openxmlformats.org/drawingml/2006/main"/>
           <a:p xmlns:a="http://schemas.openxmlformats.org/drawingml/2006/main">
             <a:r>
-              <a:t>After tutorial Step 3: run the app or inspect the code. Ask students to explain the observed result. Source: Module 8 Word tutorial.</a:t>
+              <a:t>After tutorial Step 2: run the app or inspect the code. Ask students to explain the observed result. Source: Module 8 Word tutorial.</a:t>
             </a:r>
           </a:p>
         </p:txBody>
@@ -1279,7 +1492,7 @@
           <a:lstStyle xmlns:a="http://schemas.openxmlformats.org/drawingml/2006/main"/>
           <a:p xmlns:a="http://schemas.openxmlformats.org/drawingml/2006/main">
             <a:r>
-              <a:t>Before tutorial Step 4: explain these concepts. Ask students to predict what the change will do. Then open Step 4 in the Word tutorial. Source: Module 8 Word tutorial.</a:t>
+              <a:t>Before tutorial Step 3: explain these concepts. Ask students to predict what the change will do. Then open Step 3 in the Word tutorial. Source: Module 8 Word tutorial. Related MAUI documentation: https://learn.microsoft.com/dotnet/communitytoolkit/mvvm/generators/overview</a:t>
             </a:r>
           </a:p>
         </p:txBody>
@@ -1389,7 +1602,7 @@
           <p:cNvPr id="14" name="Picture 13">
             <a:extLst xmlns:a="http://schemas.openxmlformats.org/drawingml/2006/main">
               <a:ext uri="{FF2B5EF4-FFF2-40B4-BE49-F238E27FC236}">
-                <a16:creationId xmlns:a16="http://schemas.microsoft.com/office/drawing/2014/main" id="{A07C1ED5-703E-4219-B88F-136E80243E35}"/>
+                <a16:creationId xmlns:a16="http://schemas.microsoft.com/office/drawing/2014/main" id="{698F7B07-AE24-4B2D-911F-539CE9A370E0}"/>
               </a:ext>
             </a:extLst>
           </p:cNvPr>
@@ -1399,7 +1612,7 @@
           <p:nvPr/>
         </p:nvPicPr>
         <p:blipFill>
-          <a:blip xmlns:r="http://schemas.openxmlformats.org/officeDocument/2006/relationships" xmlns:a="http://schemas.openxmlformats.org/drawingml/2006/main" r:embed="R4eecec5497c94ecb">
+          <a:blip xmlns:r="http://schemas.openxmlformats.org/officeDocument/2006/relationships" xmlns:a="http://schemas.openxmlformats.org/drawingml/2006/main" r:embed="Rc70203887124492e">
             <a:alphaModFix amt="40000"/>
           </a:blip>
           <a:stretch xmlns:a="http://schemas.openxmlformats.org/drawingml/2006/main">
@@ -1562,7 +1775,7 @@
           <p:cNvPr id="2" name="Title 1">
             <a:extLst xmlns:a="http://schemas.openxmlformats.org/drawingml/2006/main">
               <a:ext uri="{FF2B5EF4-FFF2-40B4-BE49-F238E27FC236}">
-                <a16:creationId xmlns:a16="http://schemas.microsoft.com/office/drawing/2014/main" id="{1DA352A7-9178-419F-AE28-926A9FA55FC2}"/>
+                <a16:creationId xmlns:a16="http://schemas.microsoft.com/office/drawing/2014/main" id="{CA331167-B67B-49E5-B0CD-D602ACAFC1E7}"/>
               </a:ext>
             </a:extLst>
           </p:cNvPr>
@@ -1609,7 +1822,7 @@
           <p:cNvPr id="3" name="Subtitle 2">
             <a:extLst xmlns:a="http://schemas.openxmlformats.org/drawingml/2006/main">
               <a:ext uri="{FF2B5EF4-FFF2-40B4-BE49-F238E27FC236}">
-                <a16:creationId xmlns:a16="http://schemas.microsoft.com/office/drawing/2014/main" id="{DE8E5436-A3E4-4FA5-A122-72CEDCA125C4}"/>
+                <a16:creationId xmlns:a16="http://schemas.microsoft.com/office/drawing/2014/main" id="{F3763D22-D066-40CC-BF7E-770ADB589F68}"/>
               </a:ext>
             </a:extLst>
           </p:cNvPr>
@@ -1737,7 +1950,7 @@
           <p:cNvPr id="4" name="Date Placeholder 3">
             <a:extLst xmlns:a="http://schemas.openxmlformats.org/drawingml/2006/main">
               <a:ext uri="{FF2B5EF4-FFF2-40B4-BE49-F238E27FC236}">
-                <a16:creationId xmlns:a16="http://schemas.microsoft.com/office/drawing/2014/main" id="{F86566EC-B05E-49DA-AF71-A8237642A682}"/>
+                <a16:creationId xmlns:a16="http://schemas.microsoft.com/office/drawing/2014/main" id="{65A12152-E25C-458F-831A-564975818278}"/>
               </a:ext>
             </a:extLst>
           </p:cNvPr>
@@ -1765,7 +1978,7 @@
           <p:cNvPr id="5" name="Footer Placeholder 4">
             <a:extLst xmlns:a="http://schemas.openxmlformats.org/drawingml/2006/main">
               <a:ext uri="{FF2B5EF4-FFF2-40B4-BE49-F238E27FC236}">
-                <a16:creationId xmlns:a16="http://schemas.microsoft.com/office/drawing/2014/main" id="{F141D153-7812-4042-9061-6863D17E675C}"/>
+                <a16:creationId xmlns:a16="http://schemas.microsoft.com/office/drawing/2014/main" id="{931C020C-D050-4766-BED9-603F31FBE1AB}"/>
               </a:ext>
             </a:extLst>
           </p:cNvPr>
@@ -1790,7 +2003,7 @@
           <p:cNvPr id="6" name="Slide Number Placeholder 5">
             <a:extLst xmlns:a="http://schemas.openxmlformats.org/drawingml/2006/main">
               <a:ext uri="{FF2B5EF4-FFF2-40B4-BE49-F238E27FC236}">
-                <a16:creationId xmlns:a16="http://schemas.microsoft.com/office/drawing/2014/main" id="{1D627F4A-9F6E-4DB3-9FB9-979631EB808B}"/>
+                <a16:creationId xmlns:a16="http://schemas.microsoft.com/office/drawing/2014/main" id="{E49979D3-EEFD-4F23-A2A2-995131AAD2F5}"/>
               </a:ext>
             </a:extLst>
           </p:cNvPr>
@@ -1889,7 +2102,7 @@
           <p:cNvPr id="2" name="Title 1">
             <a:extLst xmlns:a="http://schemas.openxmlformats.org/drawingml/2006/main">
               <a:ext uri="{FF2B5EF4-FFF2-40B4-BE49-F238E27FC236}">
-                <a16:creationId xmlns:a16="http://schemas.microsoft.com/office/drawing/2014/main" id="{1C5A621A-5B9C-413A-9BD0-2490A6DB4D6A}"/>
+                <a16:creationId xmlns:a16="http://schemas.microsoft.com/office/drawing/2014/main" id="{274F052B-22D5-4DAA-A1E0-D050962B940C}"/>
               </a:ext>
             </a:extLst>
           </p:cNvPr>
@@ -1916,7 +2129,7 @@
           <p:cNvPr id="3" name="Vertical Text Placeholder 2">
             <a:extLst xmlns:a="http://schemas.openxmlformats.org/drawingml/2006/main">
               <a:ext uri="{FF2B5EF4-FFF2-40B4-BE49-F238E27FC236}">
-                <a16:creationId xmlns:a16="http://schemas.microsoft.com/office/drawing/2014/main" id="{55059269-E20B-486C-A1E1-DD842E13497D}"/>
+                <a16:creationId xmlns:a16="http://schemas.microsoft.com/office/drawing/2014/main" id="{26690E1E-46BD-426C-867C-6BAE3E330F95}"/>
               </a:ext>
             </a:extLst>
           </p:cNvPr>
@@ -1978,7 +2191,7 @@
           <p:cNvPr id="4" name="Date Placeholder 3">
             <a:extLst xmlns:a="http://schemas.openxmlformats.org/drawingml/2006/main">
               <a:ext uri="{FF2B5EF4-FFF2-40B4-BE49-F238E27FC236}">
-                <a16:creationId xmlns:a16="http://schemas.microsoft.com/office/drawing/2014/main" id="{197A1901-DA5E-4450-83D2-45C86CC0B95C}"/>
+                <a16:creationId xmlns:a16="http://schemas.microsoft.com/office/drawing/2014/main" id="{ED487ABF-F850-411D-BA25-558B65A38726}"/>
               </a:ext>
             </a:extLst>
           </p:cNvPr>
@@ -2006,7 +2219,7 @@
           <p:cNvPr id="5" name="Footer Placeholder 4">
             <a:extLst xmlns:a="http://schemas.openxmlformats.org/drawingml/2006/main">
               <a:ext uri="{FF2B5EF4-FFF2-40B4-BE49-F238E27FC236}">
-                <a16:creationId xmlns:a16="http://schemas.microsoft.com/office/drawing/2014/main" id="{2B22FDEA-89FB-4960-A35B-DA6987F35B7C}"/>
+                <a16:creationId xmlns:a16="http://schemas.microsoft.com/office/drawing/2014/main" id="{142A2092-3FB1-4987-A694-E3A090F17AAC}"/>
               </a:ext>
             </a:extLst>
           </p:cNvPr>
@@ -2031,7 +2244,7 @@
           <p:cNvPr id="6" name="Slide Number Placeholder 5">
             <a:extLst xmlns:a="http://schemas.openxmlformats.org/drawingml/2006/main">
               <a:ext uri="{FF2B5EF4-FFF2-40B4-BE49-F238E27FC236}">
-                <a16:creationId xmlns:a16="http://schemas.microsoft.com/office/drawing/2014/main" id="{6A56B34A-741B-4967-A34B-B1205B809786}"/>
+                <a16:creationId xmlns:a16="http://schemas.microsoft.com/office/drawing/2014/main" id="{0BD24457-7A73-40D3-8C56-DB1C9D1FB792}"/>
               </a:ext>
             </a:extLst>
           </p:cNvPr>
@@ -2076,7 +2289,7 @@
           <p:cNvPr id="2" name="Vertical Title 1">
             <a:extLst xmlns:a="http://schemas.openxmlformats.org/drawingml/2006/main">
               <a:ext uri="{FF2B5EF4-FFF2-40B4-BE49-F238E27FC236}">
-                <a16:creationId xmlns:a16="http://schemas.microsoft.com/office/drawing/2014/main" id="{2C7304C0-10B9-40F7-B259-861047B759DA}"/>
+                <a16:creationId xmlns:a16="http://schemas.microsoft.com/office/drawing/2014/main" id="{3115FFC4-D8FF-455D-AB34-5C234C9EC096}"/>
               </a:ext>
             </a:extLst>
           </p:cNvPr>
@@ -2108,7 +2321,7 @@
           <p:cNvPr id="3" name="Vertical Text Placeholder 2">
             <a:extLst xmlns:a="http://schemas.openxmlformats.org/drawingml/2006/main">
               <a:ext uri="{FF2B5EF4-FFF2-40B4-BE49-F238E27FC236}">
-                <a16:creationId xmlns:a16="http://schemas.microsoft.com/office/drawing/2014/main" id="{E72C2703-C118-4E5E-896A-AD6BE95CBCA1}"/>
+                <a16:creationId xmlns:a16="http://schemas.microsoft.com/office/drawing/2014/main" id="{69782EE5-8ECA-430E-86BF-9A7B06015A53}"/>
               </a:ext>
             </a:extLst>
           </p:cNvPr>
@@ -2175,7 +2388,7 @@
           <p:cNvPr id="4" name="Date Placeholder 3">
             <a:extLst xmlns:a="http://schemas.openxmlformats.org/drawingml/2006/main">
               <a:ext uri="{FF2B5EF4-FFF2-40B4-BE49-F238E27FC236}">
-                <a16:creationId xmlns:a16="http://schemas.microsoft.com/office/drawing/2014/main" id="{AA22446D-0510-4039-B4CF-D6E88E9901CD}"/>
+                <a16:creationId xmlns:a16="http://schemas.microsoft.com/office/drawing/2014/main" id="{C734747E-80D4-4DB0-9DD4-22CCDEA1DBED}"/>
               </a:ext>
             </a:extLst>
           </p:cNvPr>
@@ -2203,7 +2416,7 @@
           <p:cNvPr id="5" name="Footer Placeholder 4">
             <a:extLst xmlns:a="http://schemas.openxmlformats.org/drawingml/2006/main">
               <a:ext uri="{FF2B5EF4-FFF2-40B4-BE49-F238E27FC236}">
-                <a16:creationId xmlns:a16="http://schemas.microsoft.com/office/drawing/2014/main" id="{8438CE95-4C16-4A1D-827E-2B24C3DF697A}"/>
+                <a16:creationId xmlns:a16="http://schemas.microsoft.com/office/drawing/2014/main" id="{627EAC81-9EFA-480E-9BCD-C06363B513DF}"/>
               </a:ext>
             </a:extLst>
           </p:cNvPr>
@@ -2228,7 +2441,7 @@
           <p:cNvPr id="6" name="Slide Number Placeholder 5">
             <a:extLst xmlns:a="http://schemas.openxmlformats.org/drawingml/2006/main">
               <a:ext uri="{FF2B5EF4-FFF2-40B4-BE49-F238E27FC236}">
-                <a16:creationId xmlns:a16="http://schemas.microsoft.com/office/drawing/2014/main" id="{044D0D2A-23FD-49A9-862A-DA90725C77E4}"/>
+                <a16:creationId xmlns:a16="http://schemas.microsoft.com/office/drawing/2014/main" id="{EE31932D-BA6F-4CEA-A5DC-28DE9AD74752}"/>
               </a:ext>
             </a:extLst>
           </p:cNvPr>
@@ -2273,7 +2486,7 @@
           <p:cNvPr id="3" name="Content Placeholder 2">
             <a:extLst xmlns:a="http://schemas.openxmlformats.org/drawingml/2006/main">
               <a:ext uri="{FF2B5EF4-FFF2-40B4-BE49-F238E27FC236}">
-                <a16:creationId xmlns:a16="http://schemas.microsoft.com/office/drawing/2014/main" id="{09B5024B-0355-49FD-B043-323569B7D3FA}"/>
+                <a16:creationId xmlns:a16="http://schemas.microsoft.com/office/drawing/2014/main" id="{A8260EDC-725B-40CD-BB7B-480C01FE9DD9}"/>
               </a:ext>
             </a:extLst>
           </p:cNvPr>
@@ -2336,7 +2549,7 @@
           <p:cNvPr id="4" name="Date Placeholder 3">
             <a:extLst xmlns:a="http://schemas.openxmlformats.org/drawingml/2006/main">
               <a:ext uri="{FF2B5EF4-FFF2-40B4-BE49-F238E27FC236}">
-                <a16:creationId xmlns:a16="http://schemas.microsoft.com/office/drawing/2014/main" id="{B02934F9-252B-4A4E-9E89-3BF07D87A817}"/>
+                <a16:creationId xmlns:a16="http://schemas.microsoft.com/office/drawing/2014/main" id="{938AC0BC-8C5E-4934-91DB-0D799A4D3567}"/>
               </a:ext>
             </a:extLst>
           </p:cNvPr>
@@ -2364,7 +2577,7 @@
           <p:cNvPr id="5" name="Footer Placeholder 4">
             <a:extLst xmlns:a="http://schemas.openxmlformats.org/drawingml/2006/main">
               <a:ext uri="{FF2B5EF4-FFF2-40B4-BE49-F238E27FC236}">
-                <a16:creationId xmlns:a16="http://schemas.microsoft.com/office/drawing/2014/main" id="{A3BDB22C-BC9E-4822-8AE5-053435B4889A}"/>
+                <a16:creationId xmlns:a16="http://schemas.microsoft.com/office/drawing/2014/main" id="{3B7882F1-7855-4BE5-85DB-EE33DCE563F2}"/>
               </a:ext>
             </a:extLst>
           </p:cNvPr>
@@ -2389,7 +2602,7 @@
           <p:cNvPr id="6" name="Slide Number Placeholder 5">
             <a:extLst xmlns:a="http://schemas.openxmlformats.org/drawingml/2006/main">
               <a:ext uri="{FF2B5EF4-FFF2-40B4-BE49-F238E27FC236}">
-                <a16:creationId xmlns:a16="http://schemas.microsoft.com/office/drawing/2014/main" id="{41F7D1AC-058A-44C8-B22C-214C580121EA}"/>
+                <a16:creationId xmlns:a16="http://schemas.microsoft.com/office/drawing/2014/main" id="{E6458388-4EA8-4C8C-B28D-9FAFBF91A474}"/>
               </a:ext>
             </a:extLst>
           </p:cNvPr>
@@ -2477,7 +2690,7 @@
           <p:cNvPr id="2" name="Title 1">
             <a:extLst xmlns:a="http://schemas.openxmlformats.org/drawingml/2006/main">
               <a:ext uri="{FF2B5EF4-FFF2-40B4-BE49-F238E27FC236}">
-                <a16:creationId xmlns:a16="http://schemas.microsoft.com/office/drawing/2014/main" id="{FD63E329-4D02-4294-AF58-B92559C0BAF8}"/>
+                <a16:creationId xmlns:a16="http://schemas.microsoft.com/office/drawing/2014/main" id="{50AD5473-48A8-4CA7-8275-CE42EACF5961}"/>
               </a:ext>
             </a:extLst>
           </p:cNvPr>
@@ -2515,7 +2728,7 @@
           <p:cNvPr id="3" name="Text Placeholder 2">
             <a:extLst xmlns:a="http://schemas.openxmlformats.org/drawingml/2006/main">
               <a:ext uri="{FF2B5EF4-FFF2-40B4-BE49-F238E27FC236}">
-                <a16:creationId xmlns:a16="http://schemas.microsoft.com/office/drawing/2014/main" id="{59C3C0AB-FF8B-4174-9659-C139B471F556}"/>
+                <a16:creationId xmlns:a16="http://schemas.microsoft.com/office/drawing/2014/main" id="{30523690-BF0B-4A89-B384-FED72F150252}"/>
               </a:ext>
             </a:extLst>
           </p:cNvPr>
@@ -2641,7 +2854,7 @@
           <p:cNvPr id="4" name="Date Placeholder 3">
             <a:extLst xmlns:a="http://schemas.openxmlformats.org/drawingml/2006/main">
               <a:ext uri="{FF2B5EF4-FFF2-40B4-BE49-F238E27FC236}">
-                <a16:creationId xmlns:a16="http://schemas.microsoft.com/office/drawing/2014/main" id="{44F2448F-DA7B-4840-90AB-4D85161566D9}"/>
+                <a16:creationId xmlns:a16="http://schemas.microsoft.com/office/drawing/2014/main" id="{90BBF690-EDF8-4045-8EBF-51378D426695}"/>
               </a:ext>
             </a:extLst>
           </p:cNvPr>
@@ -2669,7 +2882,7 @@
           <p:cNvPr id="5" name="Footer Placeholder 4">
             <a:extLst xmlns:a="http://schemas.openxmlformats.org/drawingml/2006/main">
               <a:ext uri="{FF2B5EF4-FFF2-40B4-BE49-F238E27FC236}">
-                <a16:creationId xmlns:a16="http://schemas.microsoft.com/office/drawing/2014/main" id="{DCA7233D-8A7D-4F4B-BCA2-71B50E17D6C6}"/>
+                <a16:creationId xmlns:a16="http://schemas.microsoft.com/office/drawing/2014/main" id="{97EA8E08-CE12-4C05-B23B-F70CDE818F2F}"/>
               </a:ext>
             </a:extLst>
           </p:cNvPr>
@@ -2694,7 +2907,7 @@
           <p:cNvPr id="6" name="Slide Number Placeholder 5">
             <a:extLst xmlns:a="http://schemas.openxmlformats.org/drawingml/2006/main">
               <a:ext uri="{FF2B5EF4-FFF2-40B4-BE49-F238E27FC236}">
-                <a16:creationId xmlns:a16="http://schemas.microsoft.com/office/drawing/2014/main" id="{26FE5A34-CFA6-4E10-9FDF-58EB4FD031AD}"/>
+                <a16:creationId xmlns:a16="http://schemas.microsoft.com/office/drawing/2014/main" id="{AA5A4466-E98D-45D0-BB33-A1DF9826317F}"/>
               </a:ext>
             </a:extLst>
           </p:cNvPr>
@@ -2739,7 +2952,7 @@
           <p:cNvPr id="2" name="Title 1">
             <a:extLst xmlns:a="http://schemas.openxmlformats.org/drawingml/2006/main">
               <a:ext uri="{FF2B5EF4-FFF2-40B4-BE49-F238E27FC236}">
-                <a16:creationId xmlns:a16="http://schemas.microsoft.com/office/drawing/2014/main" id="{DF05463C-7626-40B3-AD36-E89FD92D6E65}"/>
+                <a16:creationId xmlns:a16="http://schemas.microsoft.com/office/drawing/2014/main" id="{578708FA-72DB-41BD-9AD6-EFCB0470FF2B}"/>
               </a:ext>
             </a:extLst>
           </p:cNvPr>
@@ -2766,7 +2979,7 @@
           <p:cNvPr id="3" name="Content Placeholder 2">
             <a:extLst xmlns:a="http://schemas.openxmlformats.org/drawingml/2006/main">
               <a:ext uri="{FF2B5EF4-FFF2-40B4-BE49-F238E27FC236}">
-                <a16:creationId xmlns:a16="http://schemas.microsoft.com/office/drawing/2014/main" id="{BC50DA24-BC7B-42E2-BDA1-07CFB6D3A2BC}"/>
+                <a16:creationId xmlns:a16="http://schemas.microsoft.com/office/drawing/2014/main" id="{0590D387-A2C0-49FE-8913-2786C37F840F}"/>
               </a:ext>
             </a:extLst>
           </p:cNvPr>
@@ -2871,7 +3084,7 @@
           <p:cNvPr id="4" name="Content Placeholder 3">
             <a:extLst xmlns:a="http://schemas.openxmlformats.org/drawingml/2006/main">
               <a:ext uri="{FF2B5EF4-FFF2-40B4-BE49-F238E27FC236}">
-                <a16:creationId xmlns:a16="http://schemas.microsoft.com/office/drawing/2014/main" id="{0536209A-9E9B-4CC6-988C-ABF3AED0DC88}"/>
+                <a16:creationId xmlns:a16="http://schemas.microsoft.com/office/drawing/2014/main" id="{A76104D3-A86E-41B8-93FD-23AB9AAFE0A9}"/>
               </a:ext>
             </a:extLst>
           </p:cNvPr>
@@ -2976,7 +3189,7 @@
           <p:cNvPr id="5" name="Date Placeholder 4">
             <a:extLst xmlns:a="http://schemas.openxmlformats.org/drawingml/2006/main">
               <a:ext uri="{FF2B5EF4-FFF2-40B4-BE49-F238E27FC236}">
-                <a16:creationId xmlns:a16="http://schemas.microsoft.com/office/drawing/2014/main" id="{B6795349-E00C-440F-9935-B7AF400D9CA1}"/>
+                <a16:creationId xmlns:a16="http://schemas.microsoft.com/office/drawing/2014/main" id="{AFB837E0-CC78-4A59-98C5-805CE75A15F7}"/>
               </a:ext>
             </a:extLst>
           </p:cNvPr>
@@ -3004,7 +3217,7 @@
           <p:cNvPr id="6" name="Footer Placeholder 5">
             <a:extLst xmlns:a="http://schemas.openxmlformats.org/drawingml/2006/main">
               <a:ext uri="{FF2B5EF4-FFF2-40B4-BE49-F238E27FC236}">
-                <a16:creationId xmlns:a16="http://schemas.microsoft.com/office/drawing/2014/main" id="{BAA60C37-0423-4DF3-85A0-2410D8BB21D3}"/>
+                <a16:creationId xmlns:a16="http://schemas.microsoft.com/office/drawing/2014/main" id="{DAEB836B-C4D6-442E-9F34-1EF4CB91E0B3}"/>
               </a:ext>
             </a:extLst>
           </p:cNvPr>
@@ -3029,7 +3242,7 @@
           <p:cNvPr id="7" name="Slide Number Placeholder 6">
             <a:extLst xmlns:a="http://schemas.openxmlformats.org/drawingml/2006/main">
               <a:ext uri="{FF2B5EF4-FFF2-40B4-BE49-F238E27FC236}">
-                <a16:creationId xmlns:a16="http://schemas.microsoft.com/office/drawing/2014/main" id="{37224335-AA24-4252-86A0-47CA4E3B479A}"/>
+                <a16:creationId xmlns:a16="http://schemas.microsoft.com/office/drawing/2014/main" id="{D821240A-2941-4CDE-AF26-41E5FF5323F2}"/>
               </a:ext>
             </a:extLst>
           </p:cNvPr>
@@ -3074,7 +3287,7 @@
           <p:cNvPr id="2" name="Title 1">
             <a:extLst xmlns:a="http://schemas.openxmlformats.org/drawingml/2006/main">
               <a:ext uri="{FF2B5EF4-FFF2-40B4-BE49-F238E27FC236}">
-                <a16:creationId xmlns:a16="http://schemas.microsoft.com/office/drawing/2014/main" id="{21D95BF8-13E3-4944-B579-1707BA436526}"/>
+                <a16:creationId xmlns:a16="http://schemas.microsoft.com/office/drawing/2014/main" id="{390C962A-54C6-48DC-90C4-0069E718DA42}"/>
               </a:ext>
             </a:extLst>
           </p:cNvPr>
@@ -3106,7 +3319,7 @@
           <p:cNvPr id="3" name="Text Placeholder 2">
             <a:extLst xmlns:a="http://schemas.openxmlformats.org/drawingml/2006/main">
               <a:ext uri="{FF2B5EF4-FFF2-40B4-BE49-F238E27FC236}">
-                <a16:creationId xmlns:a16="http://schemas.microsoft.com/office/drawing/2014/main" id="{DEBF5CE8-5F30-493E-9242-EF6A03CD8EA8}"/>
+                <a16:creationId xmlns:a16="http://schemas.microsoft.com/office/drawing/2014/main" id="{967E35D5-93F1-476D-9717-B67E71CA46F5}"/>
               </a:ext>
             </a:extLst>
           </p:cNvPr>
@@ -3178,7 +3391,7 @@
           <p:cNvPr id="4" name="Content Placeholder 3">
             <a:extLst xmlns:a="http://schemas.openxmlformats.org/drawingml/2006/main">
               <a:ext uri="{FF2B5EF4-FFF2-40B4-BE49-F238E27FC236}">
-                <a16:creationId xmlns:a16="http://schemas.microsoft.com/office/drawing/2014/main" id="{4F1DF919-816F-4D27-A9D7-A3911CBC822D}"/>
+                <a16:creationId xmlns:a16="http://schemas.microsoft.com/office/drawing/2014/main" id="{88E3C166-1558-4078-BFE6-0AA8449E309B}"/>
               </a:ext>
             </a:extLst>
           </p:cNvPr>
@@ -3282,7 +3495,7 @@
           <p:cNvPr id="5" name="Text Placeholder 4">
             <a:extLst xmlns:a="http://schemas.openxmlformats.org/drawingml/2006/main">
               <a:ext uri="{FF2B5EF4-FFF2-40B4-BE49-F238E27FC236}">
-                <a16:creationId xmlns:a16="http://schemas.microsoft.com/office/drawing/2014/main" id="{EA4B1E1E-721D-4265-BCCA-91E1F0AE8F4D}"/>
+                <a16:creationId xmlns:a16="http://schemas.microsoft.com/office/drawing/2014/main" id="{DB8EA3A5-188F-4BDA-A6B4-6764D0E268DB}"/>
               </a:ext>
             </a:extLst>
           </p:cNvPr>
@@ -3354,7 +3567,7 @@
           <p:cNvPr id="6" name="Content Placeholder 5">
             <a:extLst xmlns:a="http://schemas.openxmlformats.org/drawingml/2006/main">
               <a:ext uri="{FF2B5EF4-FFF2-40B4-BE49-F238E27FC236}">
-                <a16:creationId xmlns:a16="http://schemas.microsoft.com/office/drawing/2014/main" id="{9E870A6A-BAB7-481B-85E0-0489386BAF63}"/>
+                <a16:creationId xmlns:a16="http://schemas.microsoft.com/office/drawing/2014/main" id="{DA937A05-D3FE-48FA-A2CE-9B62464FDF7E}"/>
               </a:ext>
             </a:extLst>
           </p:cNvPr>
@@ -3458,7 +3671,7 @@
           <p:cNvPr id="7" name="Date Placeholder 6">
             <a:extLst xmlns:a="http://schemas.openxmlformats.org/drawingml/2006/main">
               <a:ext uri="{FF2B5EF4-FFF2-40B4-BE49-F238E27FC236}">
-                <a16:creationId xmlns:a16="http://schemas.microsoft.com/office/drawing/2014/main" id="{D436523C-953A-409D-97A4-92DEC409546F}"/>
+                <a16:creationId xmlns:a16="http://schemas.microsoft.com/office/drawing/2014/main" id="{31A3FE3E-2A14-411A-9756-5D305BB284D2}"/>
               </a:ext>
             </a:extLst>
           </p:cNvPr>
@@ -3486,7 +3699,7 @@
           <p:cNvPr id="8" name="Footer Placeholder 7">
             <a:extLst xmlns:a="http://schemas.openxmlformats.org/drawingml/2006/main">
               <a:ext uri="{FF2B5EF4-FFF2-40B4-BE49-F238E27FC236}">
-                <a16:creationId xmlns:a16="http://schemas.microsoft.com/office/drawing/2014/main" id="{24AE5805-08D9-4A9B-A04E-DA8C7C95EE65}"/>
+                <a16:creationId xmlns:a16="http://schemas.microsoft.com/office/drawing/2014/main" id="{83883B63-B652-4A64-8449-ED8D4D64D8F5}"/>
               </a:ext>
             </a:extLst>
           </p:cNvPr>
@@ -3511,7 +3724,7 @@
           <p:cNvPr id="9" name="Slide Number Placeholder 8">
             <a:extLst xmlns:a="http://schemas.openxmlformats.org/drawingml/2006/main">
               <a:ext uri="{FF2B5EF4-FFF2-40B4-BE49-F238E27FC236}">
-                <a16:creationId xmlns:a16="http://schemas.microsoft.com/office/drawing/2014/main" id="{0BD6DCB8-1820-4905-BCA2-822C69B7560F}"/>
+                <a16:creationId xmlns:a16="http://schemas.microsoft.com/office/drawing/2014/main" id="{11D64C78-E47A-4A86-A052-545738A895B7}"/>
               </a:ext>
             </a:extLst>
           </p:cNvPr>
@@ -3556,7 +3769,7 @@
           <p:cNvPr id="2" name="Title 1">
             <a:extLst xmlns:a="http://schemas.openxmlformats.org/drawingml/2006/main">
               <a:ext uri="{FF2B5EF4-FFF2-40B4-BE49-F238E27FC236}">
-                <a16:creationId xmlns:a16="http://schemas.microsoft.com/office/drawing/2014/main" id="{C5928B19-3A00-493F-B37D-9E4572A8AD81}"/>
+                <a16:creationId xmlns:a16="http://schemas.microsoft.com/office/drawing/2014/main" id="{08CC2918-1A85-43DE-B096-43D7FBCA0FC8}"/>
               </a:ext>
             </a:extLst>
           </p:cNvPr>
@@ -3583,7 +3796,7 @@
           <p:cNvPr id="3" name="Date Placeholder 2">
             <a:extLst xmlns:a="http://schemas.openxmlformats.org/drawingml/2006/main">
               <a:ext uri="{FF2B5EF4-FFF2-40B4-BE49-F238E27FC236}">
-                <a16:creationId xmlns:a16="http://schemas.microsoft.com/office/drawing/2014/main" id="{9B746708-F2C1-4116-BFA8-9C8A03E40FDC}"/>
+                <a16:creationId xmlns:a16="http://schemas.microsoft.com/office/drawing/2014/main" id="{3194A914-97D8-4487-AC0D-FEAE90D7FC30}"/>
               </a:ext>
             </a:extLst>
           </p:cNvPr>
@@ -3611,7 +3824,7 @@
           <p:cNvPr id="4" name="Footer Placeholder 3">
             <a:extLst xmlns:a="http://schemas.openxmlformats.org/drawingml/2006/main">
               <a:ext uri="{FF2B5EF4-FFF2-40B4-BE49-F238E27FC236}">
-                <a16:creationId xmlns:a16="http://schemas.microsoft.com/office/drawing/2014/main" id="{C35A2ACD-1429-4F65-993C-F98DCB392ECD}"/>
+                <a16:creationId xmlns:a16="http://schemas.microsoft.com/office/drawing/2014/main" id="{A764C813-8136-4AB1-AD7B-6E93FCD88A3C}"/>
               </a:ext>
             </a:extLst>
           </p:cNvPr>
@@ -3636,7 +3849,7 @@
           <p:cNvPr id="5" name="Slide Number Placeholder 4">
             <a:extLst xmlns:a="http://schemas.openxmlformats.org/drawingml/2006/main">
               <a:ext uri="{FF2B5EF4-FFF2-40B4-BE49-F238E27FC236}">
-                <a16:creationId xmlns:a16="http://schemas.microsoft.com/office/drawing/2014/main" id="{6116DC99-50BE-4044-89C9-6158D4ACA4FF}"/>
+                <a16:creationId xmlns:a16="http://schemas.microsoft.com/office/drawing/2014/main" id="{C798898E-CBDA-4B75-8B82-2B43C2EBE549}"/>
               </a:ext>
             </a:extLst>
           </p:cNvPr>
@@ -3681,7 +3894,7 @@
           <p:cNvPr id="2" name="Date Placeholder 1">
             <a:extLst xmlns:a="http://schemas.openxmlformats.org/drawingml/2006/main">
               <a:ext uri="{FF2B5EF4-FFF2-40B4-BE49-F238E27FC236}">
-                <a16:creationId xmlns:a16="http://schemas.microsoft.com/office/drawing/2014/main" id="{ABF35218-BFBB-4D88-A855-03FCD347C8B6}"/>
+                <a16:creationId xmlns:a16="http://schemas.microsoft.com/office/drawing/2014/main" id="{E07B1919-182A-465B-BE35-C096FAE39705}"/>
               </a:ext>
             </a:extLst>
           </p:cNvPr>
@@ -3709,7 +3922,7 @@
           <p:cNvPr id="3" name="Footer Placeholder 2">
             <a:extLst xmlns:a="http://schemas.openxmlformats.org/drawingml/2006/main">
               <a:ext uri="{FF2B5EF4-FFF2-40B4-BE49-F238E27FC236}">
-                <a16:creationId xmlns:a16="http://schemas.microsoft.com/office/drawing/2014/main" id="{3C9CBCA5-D284-4323-8B3C-DE200CB42B4D}"/>
+                <a16:creationId xmlns:a16="http://schemas.microsoft.com/office/drawing/2014/main" id="{15E8F79E-4E8F-4A9A-B7E4-4C1C2490AB55}"/>
               </a:ext>
             </a:extLst>
           </p:cNvPr>
@@ -3734,7 +3947,7 @@
           <p:cNvPr id="4" name="Slide Number Placeholder 3">
             <a:extLst xmlns:a="http://schemas.openxmlformats.org/drawingml/2006/main">
               <a:ext uri="{FF2B5EF4-FFF2-40B4-BE49-F238E27FC236}">
-                <a16:creationId xmlns:a16="http://schemas.microsoft.com/office/drawing/2014/main" id="{2076D593-5215-480A-86E8-BE71B9F21354}"/>
+                <a16:creationId xmlns:a16="http://schemas.microsoft.com/office/drawing/2014/main" id="{C10D73A7-AB5D-4E32-9AFD-C1915BABEB69}"/>
               </a:ext>
             </a:extLst>
           </p:cNvPr>
@@ -3779,7 +3992,7 @@
           <p:cNvPr id="2" name="Title 1">
             <a:extLst xmlns:a="http://schemas.openxmlformats.org/drawingml/2006/main">
               <a:ext uri="{FF2B5EF4-FFF2-40B4-BE49-F238E27FC236}">
-                <a16:creationId xmlns:a16="http://schemas.microsoft.com/office/drawing/2014/main" id="{F5BA58FE-D9B9-40E5-B8AB-FD30FB27EFCC}"/>
+                <a16:creationId xmlns:a16="http://schemas.microsoft.com/office/drawing/2014/main" id="{F2571AE8-F67C-4DFF-8F8B-967A240D747A}"/>
               </a:ext>
             </a:extLst>
           </p:cNvPr>
@@ -3816,7 +4029,7 @@
           <p:cNvPr id="3" name="Content Placeholder 2">
             <a:extLst xmlns:a="http://schemas.openxmlformats.org/drawingml/2006/main">
               <a:ext uri="{FF2B5EF4-FFF2-40B4-BE49-F238E27FC236}">
-                <a16:creationId xmlns:a16="http://schemas.microsoft.com/office/drawing/2014/main" id="{29B5E32B-B091-4BF7-8551-1ABFF73AD730}"/>
+                <a16:creationId xmlns:a16="http://schemas.microsoft.com/office/drawing/2014/main" id="{5BED9E3C-993B-4C14-9071-DBB579F973D2}"/>
               </a:ext>
             </a:extLst>
           </p:cNvPr>
@@ -3920,7 +4133,7 @@
           <p:cNvPr id="4" name="Text Placeholder 3">
             <a:extLst xmlns:a="http://schemas.openxmlformats.org/drawingml/2006/main">
               <a:ext uri="{FF2B5EF4-FFF2-40B4-BE49-F238E27FC236}">
-                <a16:creationId xmlns:a16="http://schemas.microsoft.com/office/drawing/2014/main" id="{AEFD08DF-C723-467C-A8CF-4AF1C8586E62}"/>
+                <a16:creationId xmlns:a16="http://schemas.microsoft.com/office/drawing/2014/main" id="{0740BCDB-347F-482F-BD69-EB59778508FF}"/>
               </a:ext>
             </a:extLst>
           </p:cNvPr>
@@ -3992,7 +4205,7 @@
           <p:cNvPr id="5" name="Date Placeholder 4">
             <a:extLst xmlns:a="http://schemas.openxmlformats.org/drawingml/2006/main">
               <a:ext uri="{FF2B5EF4-FFF2-40B4-BE49-F238E27FC236}">
-                <a16:creationId xmlns:a16="http://schemas.microsoft.com/office/drawing/2014/main" id="{2E5D2017-9B46-4068-AE7F-918B7D4D3BE3}"/>
+                <a16:creationId xmlns:a16="http://schemas.microsoft.com/office/drawing/2014/main" id="{C533DB6C-C230-4A79-87FD-0CB7E672D3E7}"/>
               </a:ext>
             </a:extLst>
           </p:cNvPr>
@@ -4020,7 +4233,7 @@
           <p:cNvPr id="6" name="Footer Placeholder 5">
             <a:extLst xmlns:a="http://schemas.openxmlformats.org/drawingml/2006/main">
               <a:ext uri="{FF2B5EF4-FFF2-40B4-BE49-F238E27FC236}">
-                <a16:creationId xmlns:a16="http://schemas.microsoft.com/office/drawing/2014/main" id="{8B196D57-CF23-4550-A8C0-7928789829F6}"/>
+                <a16:creationId xmlns:a16="http://schemas.microsoft.com/office/drawing/2014/main" id="{6E914C73-2A6D-4060-8F3C-C35E79189F17}"/>
               </a:ext>
             </a:extLst>
           </p:cNvPr>
@@ -4045,7 +4258,7 @@
           <p:cNvPr id="7" name="Slide Number Placeholder 6">
             <a:extLst xmlns:a="http://schemas.openxmlformats.org/drawingml/2006/main">
               <a:ext uri="{FF2B5EF4-FFF2-40B4-BE49-F238E27FC236}">
-                <a16:creationId xmlns:a16="http://schemas.microsoft.com/office/drawing/2014/main" id="{0600FC31-0F87-4D70-B951-4EF70CA104C2}"/>
+                <a16:creationId xmlns:a16="http://schemas.microsoft.com/office/drawing/2014/main" id="{93707B4B-1829-48AB-9CBF-730F0190A4CC}"/>
               </a:ext>
             </a:extLst>
           </p:cNvPr>
@@ -4090,7 +4303,7 @@
           <p:cNvPr id="2" name="Title 1">
             <a:extLst xmlns:a="http://schemas.openxmlformats.org/drawingml/2006/main">
               <a:ext uri="{FF2B5EF4-FFF2-40B4-BE49-F238E27FC236}">
-                <a16:creationId xmlns:a16="http://schemas.microsoft.com/office/drawing/2014/main" id="{34105333-78C1-4601-9E47-CE87A7A03DD2}"/>
+                <a16:creationId xmlns:a16="http://schemas.microsoft.com/office/drawing/2014/main" id="{18F186AC-2686-4C09-947D-247B36114839}"/>
               </a:ext>
             </a:extLst>
           </p:cNvPr>
@@ -4127,7 +4340,7 @@
           <p:cNvPr id="3" name="Picture Placeholder 2">
             <a:extLst xmlns:a="http://schemas.openxmlformats.org/drawingml/2006/main">
               <a:ext uri="{FF2B5EF4-FFF2-40B4-BE49-F238E27FC236}">
-                <a16:creationId xmlns:a16="http://schemas.microsoft.com/office/drawing/2014/main" id="{53E66C08-C7C6-4666-8589-F53BBC369942}"/>
+                <a16:creationId xmlns:a16="http://schemas.microsoft.com/office/drawing/2014/main" id="{EDCDB4CA-EFD1-4204-91C5-EDDC5AFBD2E9}"/>
               </a:ext>
             </a:extLst>
           </p:cNvPr>
@@ -4196,7 +4409,7 @@
           <p:cNvPr id="4" name="Text Placeholder 3">
             <a:extLst xmlns:a="http://schemas.openxmlformats.org/drawingml/2006/main">
               <a:ext uri="{FF2B5EF4-FFF2-40B4-BE49-F238E27FC236}">
-                <a16:creationId xmlns:a16="http://schemas.microsoft.com/office/drawing/2014/main" id="{B427F862-0265-4935-A0C2-82E55854D498}"/>
+                <a16:creationId xmlns:a16="http://schemas.microsoft.com/office/drawing/2014/main" id="{D5A8E7F7-19DE-4BE7-BAE4-BE3C40EF7955}"/>
               </a:ext>
             </a:extLst>
           </p:cNvPr>
@@ -4268,7 +4481,7 @@
           <p:cNvPr id="5" name="Date Placeholder 4">
             <a:extLst xmlns:a="http://schemas.openxmlformats.org/drawingml/2006/main">
               <a:ext uri="{FF2B5EF4-FFF2-40B4-BE49-F238E27FC236}">
-                <a16:creationId xmlns:a16="http://schemas.microsoft.com/office/drawing/2014/main" id="{04CAF65A-AD46-4564-B5BE-A8C1FD3AC117}"/>
+                <a16:creationId xmlns:a16="http://schemas.microsoft.com/office/drawing/2014/main" id="{F458B824-5EBB-42B2-A239-75E4006EC8C4}"/>
               </a:ext>
             </a:extLst>
           </p:cNvPr>
@@ -4296,7 +4509,7 @@
           <p:cNvPr id="6" name="Footer Placeholder 5">
             <a:extLst xmlns:a="http://schemas.openxmlformats.org/drawingml/2006/main">
               <a:ext uri="{FF2B5EF4-FFF2-40B4-BE49-F238E27FC236}">
-                <a16:creationId xmlns:a16="http://schemas.microsoft.com/office/drawing/2014/main" id="{9B75D28E-D9E6-494C-9833-BDBF51F5CCCA}"/>
+                <a16:creationId xmlns:a16="http://schemas.microsoft.com/office/drawing/2014/main" id="{FB906A38-50B3-4982-A5F2-F1FC0796C622}"/>
               </a:ext>
             </a:extLst>
           </p:cNvPr>
@@ -4321,7 +4534,7 @@
           <p:cNvPr id="7" name="Slide Number Placeholder 6">
             <a:extLst xmlns:a="http://schemas.openxmlformats.org/drawingml/2006/main">
               <a:ext uri="{FF2B5EF4-FFF2-40B4-BE49-F238E27FC236}">
-                <a16:creationId xmlns:a16="http://schemas.microsoft.com/office/drawing/2014/main" id="{97161448-D49B-48DC-B83E-05DA9A4F4450}"/>
+                <a16:creationId xmlns:a16="http://schemas.microsoft.com/office/drawing/2014/main" id="{F6844234-0ADB-4C21-92D9-F6ED1CF1727B}"/>
               </a:ext>
             </a:extLst>
           </p:cNvPr>
@@ -4371,7 +4584,7 @@
           <p:cNvPr id="2" name="Title Placeholder 1">
             <a:extLst xmlns:a="http://schemas.openxmlformats.org/drawingml/2006/main">
               <a:ext uri="{FF2B5EF4-FFF2-40B4-BE49-F238E27FC236}">
-                <a16:creationId xmlns:a16="http://schemas.microsoft.com/office/drawing/2014/main" id="{8496562A-0511-4B33-BE49-276911A96F53}"/>
+                <a16:creationId xmlns:a16="http://schemas.microsoft.com/office/drawing/2014/main" id="{9A084A72-6E58-4CB0-88AC-ED052DFCC2FA}"/>
               </a:ext>
             </a:extLst>
           </p:cNvPr>
@@ -4406,7 +4619,7 @@
           <p:cNvPr id="3" name="Text Placeholder 2">
             <a:extLst xmlns:a="http://schemas.openxmlformats.org/drawingml/2006/main">
               <a:ext uri="{FF2B5EF4-FFF2-40B4-BE49-F238E27FC236}">
-                <a16:creationId xmlns:a16="http://schemas.microsoft.com/office/drawing/2014/main" id="{A7311CB3-C655-4971-8AA8-98A7BF5F1EDC}"/>
+                <a16:creationId xmlns:a16="http://schemas.microsoft.com/office/drawing/2014/main" id="{47CB28FA-DA6E-4194-9948-9BC42C677C4C}"/>
               </a:ext>
             </a:extLst>
           </p:cNvPr>
@@ -4479,7 +4692,7 @@
           <p:cNvPr id="4" name="Date Placeholder 3">
             <a:extLst xmlns:a="http://schemas.openxmlformats.org/drawingml/2006/main">
               <a:ext uri="{FF2B5EF4-FFF2-40B4-BE49-F238E27FC236}">
-                <a16:creationId xmlns:a16="http://schemas.microsoft.com/office/drawing/2014/main" id="{9B76917F-551A-4CAC-B6ED-AFD7F0872D54}"/>
+                <a16:creationId xmlns:a16="http://schemas.microsoft.com/office/drawing/2014/main" id="{AD5959AC-0B37-4974-8500-52DB319CE733}"/>
               </a:ext>
             </a:extLst>
           </p:cNvPr>
@@ -4526,7 +4739,7 @@
           <p:cNvPr id="5" name="Footer Placeholder 4">
             <a:extLst xmlns:a="http://schemas.openxmlformats.org/drawingml/2006/main">
               <a:ext uri="{FF2B5EF4-FFF2-40B4-BE49-F238E27FC236}">
-                <a16:creationId xmlns:a16="http://schemas.microsoft.com/office/drawing/2014/main" id="{EFE321E8-C171-4865-B596-C174320005C2}"/>
+                <a16:creationId xmlns:a16="http://schemas.microsoft.com/office/drawing/2014/main" id="{6C5F839A-3ED5-477D-B1A7-991C0C098E32}"/>
               </a:ext>
             </a:extLst>
           </p:cNvPr>
@@ -4570,7 +4783,7 @@
           <p:cNvPr id="6" name="Slide Number Placeholder 5">
             <a:extLst xmlns:a="http://schemas.openxmlformats.org/drawingml/2006/main">
               <a:ext uri="{FF2B5EF4-FFF2-40B4-BE49-F238E27FC236}">
-                <a16:creationId xmlns:a16="http://schemas.microsoft.com/office/drawing/2014/main" id="{79B58B3C-DD5F-41AB-ACD0-662A86D2887A}"/>
+                <a16:creationId xmlns:a16="http://schemas.microsoft.com/office/drawing/2014/main" id="{F91A8B58-C0E1-454B-A6C1-6CFD0720CBC5}"/>
               </a:ext>
             </a:extLst>
           </p:cNvPr>
@@ -4617,7 +4830,7 @@
           <p:cNvPr id="11" name="Picture 10">
             <a:extLst xmlns:a="http://schemas.openxmlformats.org/drawingml/2006/main">
               <a:ext uri="{FF2B5EF4-FFF2-40B4-BE49-F238E27FC236}">
-                <a16:creationId xmlns:a16="http://schemas.microsoft.com/office/drawing/2014/main" id="{8E3B748F-D39D-4B39-8E83-8A6A768EB9ED}"/>
+                <a16:creationId xmlns:a16="http://schemas.microsoft.com/office/drawing/2014/main" id="{6C5749AE-02A9-41B8-BFF0-08EA84488D88}"/>
               </a:ext>
             </a:extLst>
           </p:cNvPr>
@@ -4627,7 +4840,7 @@
           <p:nvPr/>
         </p:nvPicPr>
         <p:blipFill>
-          <a:blip xmlns:r="http://schemas.openxmlformats.org/officeDocument/2006/relationships" xmlns:a="http://schemas.openxmlformats.org/drawingml/2006/main" r:embed="R3a4f82735531414d"/>
+          <a:blip xmlns:r="http://schemas.openxmlformats.org/officeDocument/2006/relationships" xmlns:a="http://schemas.openxmlformats.org/drawingml/2006/main" r:embed="R96bd6c7b9a644eba"/>
           <a:stretch xmlns:a="http://schemas.openxmlformats.org/drawingml/2006/main">
             <a:fillRect l="0" t="0" r="0" b="0"/>
           </a:stretch>
@@ -4646,17 +4859,17 @@
   </p:cSld>
   <p:clrMap bg1="lt1" tx1="dk1" bg2="lt2" tx2="dk2" accent1="accent1" accent2="accent2" accent3="accent3" accent4="accent4" accent5="accent5" accent6="accent6" hlink="hlink" folHlink="folHlink"/>
   <p:sldLayoutIdLst>
-    <p:sldLayoutId xmlns:r="http://schemas.openxmlformats.org/officeDocument/2006/relationships" id="2147483649" r:id="Rddf1dda27a374963"/>
-    <p:sldLayoutId xmlns:r="http://schemas.openxmlformats.org/officeDocument/2006/relationships" id="2147483650" r:id="R78e04280aca147e1"/>
-    <p:sldLayoutId xmlns:r="http://schemas.openxmlformats.org/officeDocument/2006/relationships" id="2147483651" r:id="R319f961851194dc1"/>
-    <p:sldLayoutId xmlns:r="http://schemas.openxmlformats.org/officeDocument/2006/relationships" id="2147483652" r:id="Rbd07ea6325114e12"/>
-    <p:sldLayoutId xmlns:r="http://schemas.openxmlformats.org/officeDocument/2006/relationships" id="2147483653" r:id="Rf4623db4a93b4b1a"/>
-    <p:sldLayoutId xmlns:r="http://schemas.openxmlformats.org/officeDocument/2006/relationships" id="2147483654" r:id="R0ea6ff2f863f40ad"/>
-    <p:sldLayoutId xmlns:r="http://schemas.openxmlformats.org/officeDocument/2006/relationships" id="2147483655" r:id="Rde5bdb0867c64248"/>
-    <p:sldLayoutId xmlns:r="http://schemas.openxmlformats.org/officeDocument/2006/relationships" id="2147483656" r:id="R77efd6257ccf4d2e"/>
-    <p:sldLayoutId xmlns:r="http://schemas.openxmlformats.org/officeDocument/2006/relationships" id="2147483657" r:id="R5aa8815c33a74057"/>
-    <p:sldLayoutId xmlns:r="http://schemas.openxmlformats.org/officeDocument/2006/relationships" id="2147483658" r:id="R29e6c22fa1cc4120"/>
-    <p:sldLayoutId xmlns:r="http://schemas.openxmlformats.org/officeDocument/2006/relationships" id="2147483659" r:id="Rd59c83ff9a9b4914"/>
+    <p:sldLayoutId xmlns:r="http://schemas.openxmlformats.org/officeDocument/2006/relationships" id="2147483649" r:id="Re2ba127bf5c54d02"/>
+    <p:sldLayoutId xmlns:r="http://schemas.openxmlformats.org/officeDocument/2006/relationships" id="2147483650" r:id="Rd45433c42c1d4864"/>
+    <p:sldLayoutId xmlns:r="http://schemas.openxmlformats.org/officeDocument/2006/relationships" id="2147483651" r:id="Rdbf7f5b52fd74a54"/>
+    <p:sldLayoutId xmlns:r="http://schemas.openxmlformats.org/officeDocument/2006/relationships" id="2147483652" r:id="Rdc6ebd6bb4df459d"/>
+    <p:sldLayoutId xmlns:r="http://schemas.openxmlformats.org/officeDocument/2006/relationships" id="2147483653" r:id="R7f633bb603314fe0"/>
+    <p:sldLayoutId xmlns:r="http://schemas.openxmlformats.org/officeDocument/2006/relationships" id="2147483654" r:id="R96bfef099a7640d3"/>
+    <p:sldLayoutId xmlns:r="http://schemas.openxmlformats.org/officeDocument/2006/relationships" id="2147483655" r:id="R9c755b2971814288"/>
+    <p:sldLayoutId xmlns:r="http://schemas.openxmlformats.org/officeDocument/2006/relationships" id="2147483656" r:id="Rc7a473bd28c14634"/>
+    <p:sldLayoutId xmlns:r="http://schemas.openxmlformats.org/officeDocument/2006/relationships" id="2147483657" r:id="Rfb7723f5fe82453a"/>
+    <p:sldLayoutId xmlns:r="http://schemas.openxmlformats.org/officeDocument/2006/relationships" id="2147483658" r:id="R939cb2bb5d81459a"/>
+    <p:sldLayoutId xmlns:r="http://schemas.openxmlformats.org/officeDocument/2006/relationships" id="2147483659" r:id="R133a953d3cc34922"/>
   </p:sldLayoutIdLst>
   <p:txStyles>
     <p:titleStyle>
@@ -5280,7 +5493,7 @@
           <p:cNvPr id="2" name="Content Placeholder 2">
             <a:extLst xmlns:a="http://schemas.openxmlformats.org/drawingml/2006/main">
               <a:ext uri="{FF2B5EF4-FFF2-40B4-BE49-F238E27FC236}">
-                <a16:creationId xmlns:a16="http://schemas.microsoft.com/office/drawing/2014/main" id="{09B5024B-0355-49FD-B043-323569B7D3FA}"/>
+                <a16:creationId xmlns:a16="http://schemas.microsoft.com/office/drawing/2014/main" id="{A8260EDC-725B-40CD-BB7B-480C01FE9DD9}"/>
               </a:ext>
             </a:extLst>
           </p:cNvPr>
@@ -5300,7 +5513,7 @@
               <a:buNone/>
             </a:pPr>
             <a:r>
-              <a:t>Submit and Cancel still work.</a:t>
+              <a:t>A changed input updates the message.</a:t>
             </a:r>
           </a:p>
           <a:p xmlns:a="http://schemas.openxmlformats.org/drawingml/2006/main">
@@ -5308,7 +5521,7 @@
               <a:buNone/>
             </a:pPr>
             <a:r>
-              <a:t>The BOM commands still change rows.</a:t>
+              <a:t>Submit state follows the input.</a:t>
             </a:r>
           </a:p>
         </p:txBody>
@@ -5341,44 +5554,16 @@
           <a:lstStyle xmlns:a="http://schemas.openxmlformats.org/drawingml/2006/main"/>
           <a:p xmlns:a="http://schemas.openxmlformats.org/drawingml/2006/main">
             <a:r>
-              <a:t>Step 4 Check</a:t>
+              <a:t>Step 3: What changed?</a:t>
             </a:r>
             <a:endParaRPr/>
           </a:p>
         </p:txBody>
       </p:sp>
-      <p:pic>
-        <p:nvPicPr>
-          <p:cNvPr id="4" name="">
-            <a:extLst xmlns:a="http://schemas.openxmlformats.org/drawingml/2006/main">
-              <a:ext uri="{FF2B5EF4-FFF2-40B4-BE49-F238E27FC236}">
-                <a16:creationId xmlns:a16="http://schemas.microsoft.com/office/drawing/2014/main" id="{241FA62A-96DD-47C2-BFD4-F622992C293F}"/>
-              </a:ext>
-            </a:extLst>
-          </p:cNvPr>
-          <p:cNvPicPr>
-            <a:picLocks xmlns:a="http://schemas.openxmlformats.org/drawingml/2006/main" noChangeAspect="1"/>
-          </p:cNvPicPr>
-          <p:nvPr/>
-        </p:nvPicPr>
-        <p:blipFill>
-          <a:blip xmlns:r="http://schemas.openxmlformats.org/officeDocument/2006/relationships" xmlns:a="http://schemas.openxmlformats.org/drawingml/2006/main" r:embed="R14114ea4526e4cba"/>
-          <a:stretch xmlns:a="http://schemas.openxmlformats.org/drawingml/2006/main"/>
-        </p:blipFill>
-        <p:spPr>
-          <a:xfrm xmlns:a="http://schemas.openxmlformats.org/drawingml/2006/main">
-            <a:off x="3133823" y="3190875"/>
-            <a:ext cx="5924355" cy="3048000"/>
-          </a:xfrm>
-          <a:prstGeom xmlns:a="http://schemas.openxmlformats.org/drawingml/2006/main" prst="rect">
-            <a:avLst/>
-          </a:prstGeom>
-        </p:spPr>
-      </p:pic>
     </p:spTree>
     <p:extLst>
       <p:ext uri="{BB962C8B-B14F-4D97-AF65-F5344CB8AC3E}">
-        <p14:creationId xmlns:p14="http://schemas.microsoft.com/office/powerpoint/2010/main" val="1250891764"/>
+        <p14:creationId xmlns:p14="http://schemas.microsoft.com/office/powerpoint/2010/main" val="1544418152"/>
       </p:ext>
     </p:extLst>
   </p:cSld>
@@ -5402,7 +5587,7 @@
           <p:cNvPr id="2" name="Content Placeholder 2">
             <a:extLst xmlns:a="http://schemas.openxmlformats.org/drawingml/2006/main">
               <a:ext uri="{FF2B5EF4-FFF2-40B4-BE49-F238E27FC236}">
-                <a16:creationId xmlns:a16="http://schemas.microsoft.com/office/drawing/2014/main" id="{09B5024B-0355-49FD-B043-323569B7D3FA}"/>
+                <a16:creationId xmlns:a16="http://schemas.microsoft.com/office/drawing/2014/main" id="{A8260EDC-725B-40CD-BB7B-480C01FE9DD9}"/>
               </a:ext>
             </a:extLst>
           </p:cNvPr>
@@ -5422,7 +5607,7 @@
               <a:buNone/>
             </a:pPr>
             <a:r>
-              <a:t>Show the completed app workflow.</a:t>
+              <a:t>Mark an action with RelayCommand.</a:t>
             </a:r>
           </a:p>
           <a:p xmlns:a="http://schemas.openxmlformats.org/drawingml/2006/main">
@@ -5430,15 +5615,7 @@
               <a:buNone/>
             </a:pPr>
             <a:r>
-              <a:t>Explain which responsibility changed.</a:t>
-            </a:r>
-          </a:p>
-          <a:p xmlns:a="http://schemas.openxmlformats.org/drawingml/2006/main">
-            <a:pPr lvl="0">
-              <a:buNone/>
-            </a:pPr>
-            <a:r>
-              <a:t>Check the result before the next module.</a:t>
+              <a:t>The toolkit generates the command property.</a:t>
             </a:r>
           </a:p>
         </p:txBody>
@@ -5471,7 +5648,7 @@
           <a:lstStyle xmlns:a="http://schemas.openxmlformats.org/drawingml/2006/main"/>
           <a:p xmlns:a="http://schemas.openxmlformats.org/drawingml/2006/main">
             <a:r>
-              <a:t>Module review</a:t>
+              <a:t>Step 4: RelayCommand</a:t>
             </a:r>
             <a:endParaRPr/>
           </a:p>
@@ -5480,7 +5657,333 @@
     </p:spTree>
     <p:extLst>
       <p:ext uri="{BB962C8B-B14F-4D97-AF65-F5344CB8AC3E}">
-        <p14:creationId xmlns:p14="http://schemas.microsoft.com/office/powerpoint/2010/main" val="769328219"/>
+        <p14:creationId xmlns:p14="http://schemas.microsoft.com/office/powerpoint/2010/main" val="899625839"/>
+      </p:ext>
+    </p:extLst>
+  </p:cSld>
+</p:sld>
+</file>
+
+<file path=ppt/slides/slide12.xml><?xml version="1.0" encoding="utf-8"?>
+<p:sld xmlns:p="http://schemas.openxmlformats.org/presentationml/2006/main">
+  <p:cSld>
+    <p:spTree>
+      <p:nvGrpSpPr>
+        <p:cNvPr id="1" name=""/>
+        <p:cNvGrpSpPr/>
+        <p:nvPr/>
+      </p:nvGrpSpPr>
+      <p:grpSpPr>
+        <a:xfrm xmlns:a="http://schemas.openxmlformats.org/drawingml/2006/main"/>
+      </p:grpSpPr>
+      <p:sp>
+        <p:nvSpPr>
+          <p:cNvPr id="2" name="Content Placeholder 2">
+            <a:extLst xmlns:a="http://schemas.openxmlformats.org/drawingml/2006/main">
+              <a:ext uri="{FF2B5EF4-FFF2-40B4-BE49-F238E27FC236}">
+                <a16:creationId xmlns:a16="http://schemas.microsoft.com/office/drawing/2014/main" id="{A8260EDC-725B-40CD-BB7B-480C01FE9DD9}"/>
+              </a:ext>
+            </a:extLst>
+          </p:cNvPr>
+          <p:cNvSpPr>
+            <a:spLocks xmlns:a="http://schemas.openxmlformats.org/drawingml/2006/main" noGrp="1"/>
+          </p:cNvSpPr>
+          <p:nvPr>
+            <p:ph idx="1"/>
+          </p:nvPr>
+        </p:nvSpPr>
+        <p:spPr/>
+        <p:txBody>
+          <a:bodyPr xmlns:a="http://schemas.openxmlformats.org/drawingml/2006/main"/>
+          <a:lstStyle xmlns:a="http://schemas.openxmlformats.org/drawingml/2006/main"/>
+          <a:p xmlns:a="http://schemas.openxmlformats.org/drawingml/2006/main">
+            <a:pPr lvl="0">
+              <a:buNone/>
+            </a:pPr>
+            <a:r>
+              <a:t>Submit and Cancel still work.</a:t>
+            </a:r>
+          </a:p>
+          <a:p xmlns:a="http://schemas.openxmlformats.org/drawingml/2006/main">
+            <a:pPr lvl="0">
+              <a:buNone/>
+            </a:pPr>
+            <a:r>
+              <a:t>The BOM commands still change rows.</a:t>
+            </a:r>
+          </a:p>
+        </p:txBody>
+      </p:sp>
+      <p:sp>
+        <p:nvSpPr>
+          <p:cNvPr id="3" name="Title Placeholder 1">
+            <a:extLst xmlns:a="http://schemas.openxmlformats.org/drawingml/2006/main">
+              <a:ext uri="{FF2B5EF4-FFF2-40B4-BE49-F238E27FC236}">
+                <a16:creationId xmlns:a16="http://schemas.microsoft.com/office/drawing/2014/main" id="{2DF4F548-EDEF-186D-6633-AF1ABC814BC1}"/>
+              </a:ext>
+            </a:extLst>
+          </p:cNvPr>
+          <p:cNvSpPr>
+            <a:spLocks xmlns:a="http://schemas.openxmlformats.org/drawingml/2006/main" noGrp="1"/>
+          </p:cNvSpPr>
+          <p:nvPr>
+            <p:ph type="title" idx="0"/>
+          </p:nvPr>
+        </p:nvSpPr>
+        <p:spPr>
+          <a:prstGeom xmlns:a="http://schemas.openxmlformats.org/drawingml/2006/main" prst="rect">
+            <a:avLst/>
+          </a:prstGeom>
+        </p:spPr>
+        <p:txBody>
+          <a:bodyPr xmlns:a="http://schemas.openxmlformats.org/drawingml/2006/main" vert="horz" lIns="91440" tIns="45720" rIns="91440" bIns="45720" anchor="ctr">
+            <a:normAutofit fontScale="100000"/>
+          </a:bodyPr>
+          <a:lstStyle xmlns:a="http://schemas.openxmlformats.org/drawingml/2006/main"/>
+          <a:p xmlns:a="http://schemas.openxmlformats.org/drawingml/2006/main">
+            <a:r>
+              <a:t>Step 4: What changed?</a:t>
+            </a:r>
+            <a:endParaRPr/>
+          </a:p>
+        </p:txBody>
+      </p:sp>
+      <p:pic>
+        <p:nvPicPr>
+          <p:cNvPr id="4" name="">
+            <a:extLst xmlns:a="http://schemas.openxmlformats.org/drawingml/2006/main">
+              <a:ext uri="{FF2B5EF4-FFF2-40B4-BE49-F238E27FC236}">
+                <a16:creationId xmlns:a16="http://schemas.microsoft.com/office/drawing/2014/main" id="{C213EE5F-BA7E-4BF2-8F33-4BBEC84BE0ED}"/>
+              </a:ext>
+            </a:extLst>
+          </p:cNvPr>
+          <p:cNvPicPr>
+            <a:picLocks xmlns:a="http://schemas.openxmlformats.org/drawingml/2006/main" noChangeAspect="1"/>
+          </p:cNvPicPr>
+          <p:nvPr/>
+        </p:nvPicPr>
+        <p:blipFill>
+          <a:blip xmlns:r="http://schemas.openxmlformats.org/officeDocument/2006/relationships" xmlns:a="http://schemas.openxmlformats.org/drawingml/2006/main" r:embed="R0e2d4b1eb638439a"/>
+          <a:stretch xmlns:a="http://schemas.openxmlformats.org/drawingml/2006/main"/>
+        </p:blipFill>
+        <p:spPr>
+          <a:xfrm xmlns:a="http://schemas.openxmlformats.org/drawingml/2006/main">
+            <a:off x="3133823" y="3190875"/>
+            <a:ext cx="5924355" cy="3048000"/>
+          </a:xfrm>
+          <a:prstGeom xmlns:a="http://schemas.openxmlformats.org/drawingml/2006/main" prst="rect">
+            <a:avLst/>
+          </a:prstGeom>
+        </p:spPr>
+      </p:pic>
+    </p:spTree>
+    <p:extLst>
+      <p:ext uri="{BB962C8B-B14F-4D97-AF65-F5344CB8AC3E}">
+        <p14:creationId xmlns:p14="http://schemas.microsoft.com/office/powerpoint/2010/main" val="158892225"/>
+      </p:ext>
+    </p:extLst>
+  </p:cSld>
+</p:sld>
+</file>
+
+<file path=ppt/slides/slide13.xml><?xml version="1.0" encoding="utf-8"?>
+<p:sld xmlns:p="http://schemas.openxmlformats.org/presentationml/2006/main">
+  <p:cSld>
+    <p:spTree>
+      <p:nvGrpSpPr>
+        <p:cNvPr id="1" name=""/>
+        <p:cNvGrpSpPr/>
+        <p:nvPr/>
+      </p:nvGrpSpPr>
+      <p:grpSpPr>
+        <a:xfrm xmlns:a="http://schemas.openxmlformats.org/drawingml/2006/main"/>
+      </p:grpSpPr>
+      <p:sp>
+        <p:nvSpPr>
+          <p:cNvPr id="2" name="Content Placeholder 2">
+            <a:extLst xmlns:a="http://schemas.openxmlformats.org/drawingml/2006/main">
+              <a:ext uri="{FF2B5EF4-FFF2-40B4-BE49-F238E27FC236}">
+                <a16:creationId xmlns:a16="http://schemas.microsoft.com/office/drawing/2014/main" id="{A8260EDC-725B-40CD-BB7B-480C01FE9DD9}"/>
+              </a:ext>
+            </a:extLst>
+          </p:cNvPr>
+          <p:cNvSpPr>
+            <a:spLocks xmlns:a="http://schemas.openxmlformats.org/drawingml/2006/main" noGrp="1"/>
+          </p:cNvSpPr>
+          <p:nvPr>
+            <p:ph idx="1"/>
+          </p:nvPr>
+        </p:nvSpPr>
+        <p:spPr/>
+        <p:txBody>
+          <a:bodyPr xmlns:a="http://schemas.openxmlformats.org/drawingml/2006/main"/>
+          <a:lstStyle xmlns:a="http://schemas.openxmlformats.org/drawingml/2006/main"/>
+          <a:p xmlns:a="http://schemas.openxmlformats.org/drawingml/2006/main">
+            <a:pPr lvl="0">
+              <a:buNone/>
+            </a:pPr>
+            <a:r>
+              <a:t>I can find a generated property from its field.</a:t>
+            </a:r>
+          </a:p>
+          <a:p xmlns:a="http://schemas.openxmlformats.org/drawingml/2006/main">
+            <a:pPr lvl="0">
+              <a:buNone/>
+            </a:pPr>
+            <a:r>
+              <a:t>I can trace a RelayCommand method to XAML.</a:t>
+            </a:r>
+          </a:p>
+          <a:p xmlns:a="http://schemas.openxmlformats.org/drawingml/2006/main">
+            <a:pPr lvl="0">
+              <a:buNone/>
+            </a:pPr>
+            <a:r>
+              <a:t>I can separate generated plumbing from business rules.</a:t>
+            </a:r>
+          </a:p>
+        </p:txBody>
+      </p:sp>
+      <p:sp>
+        <p:nvSpPr>
+          <p:cNvPr id="3" name="Title Placeholder 1">
+            <a:extLst xmlns:a="http://schemas.openxmlformats.org/drawingml/2006/main">
+              <a:ext uri="{FF2B5EF4-FFF2-40B4-BE49-F238E27FC236}">
+                <a16:creationId xmlns:a16="http://schemas.microsoft.com/office/drawing/2014/main" id="{2DF4F548-EDEF-186D-6633-AF1ABC814BC1}"/>
+              </a:ext>
+            </a:extLst>
+          </p:cNvPr>
+          <p:cNvSpPr>
+            <a:spLocks xmlns:a="http://schemas.openxmlformats.org/drawingml/2006/main" noGrp="1"/>
+          </p:cNvSpPr>
+          <p:nvPr>
+            <p:ph type="title" idx="0"/>
+          </p:nvPr>
+        </p:nvSpPr>
+        <p:spPr>
+          <a:prstGeom xmlns:a="http://schemas.openxmlformats.org/drawingml/2006/main" prst="rect">
+            <a:avLst/>
+          </a:prstGeom>
+        </p:spPr>
+        <p:txBody>
+          <a:bodyPr xmlns:a="http://schemas.openxmlformats.org/drawingml/2006/main" vert="horz" lIns="91440" tIns="45720" rIns="91440" bIns="45720" anchor="ctr">
+            <a:normAutofit fontScale="100000"/>
+          </a:bodyPr>
+          <a:lstStyle xmlns:a="http://schemas.openxmlformats.org/drawingml/2006/main"/>
+          <a:p xmlns:a="http://schemas.openxmlformats.org/drawingml/2006/main">
+            <a:r>
+              <a:t>What you can now explain</a:t>
+            </a:r>
+            <a:endParaRPr/>
+          </a:p>
+        </p:txBody>
+      </p:sp>
+    </p:spTree>
+    <p:extLst>
+      <p:ext uri="{BB962C8B-B14F-4D97-AF65-F5344CB8AC3E}">
+        <p14:creationId xmlns:p14="http://schemas.microsoft.com/office/powerpoint/2010/main" val="809065753"/>
+      </p:ext>
+    </p:extLst>
+  </p:cSld>
+</p:sld>
+</file>
+
+<file path=ppt/slides/slide14.xml><?xml version="1.0" encoding="utf-8"?>
+<p:sld xmlns:p="http://schemas.openxmlformats.org/presentationml/2006/main">
+  <p:cSld>
+    <p:spTree>
+      <p:nvGrpSpPr>
+        <p:cNvPr id="1" name=""/>
+        <p:cNvGrpSpPr/>
+        <p:nvPr/>
+      </p:nvGrpSpPr>
+      <p:grpSpPr>
+        <a:xfrm xmlns:a="http://schemas.openxmlformats.org/drawingml/2006/main"/>
+      </p:grpSpPr>
+      <p:sp>
+        <p:nvSpPr>
+          <p:cNvPr id="2" name="Content Placeholder 2">
+            <a:extLst xmlns:a="http://schemas.openxmlformats.org/drawingml/2006/main">
+              <a:ext uri="{FF2B5EF4-FFF2-40B4-BE49-F238E27FC236}">
+                <a16:creationId xmlns:a16="http://schemas.microsoft.com/office/drawing/2014/main" id="{A8260EDC-725B-40CD-BB7B-480C01FE9DD9}"/>
+              </a:ext>
+            </a:extLst>
+          </p:cNvPr>
+          <p:cNvSpPr>
+            <a:spLocks xmlns:a="http://schemas.openxmlformats.org/drawingml/2006/main" noGrp="1"/>
+          </p:cNvSpPr>
+          <p:nvPr>
+            <p:ph idx="1"/>
+          </p:nvPr>
+        </p:nvSpPr>
+        <p:spPr/>
+        <p:txBody>
+          <a:bodyPr xmlns:a="http://schemas.openxmlformats.org/drawingml/2006/main"/>
+          <a:lstStyle xmlns:a="http://schemas.openxmlformats.org/drawingml/2006/main"/>
+          <a:p xmlns:a="http://schemas.openxmlformats.org/drawingml/2006/main">
+            <a:pPr lvl="0">
+              <a:buNone/>
+            </a:pPr>
+            <a:r>
+              <a:t>MVVM Toolkit generators</a:t>
+            </a:r>
+          </a:p>
+          <a:p xmlns:a="http://schemas.openxmlformats.org/drawingml/2006/main">
+            <a:pPr lvl="0">
+              <a:buNone/>
+            </a:pPr>
+            <a:r>
+              <a:t>Search Microsoft Learn for this topic.</a:t>
+            </a:r>
+          </a:p>
+          <a:p xmlns:a="http://schemas.openxmlformats.org/drawingml/2006/main">
+            <a:pPr lvl="0">
+              <a:buNone/>
+            </a:pPr>
+            <a:r>
+              <a:t>Try one example in a small test page.</a:t>
+            </a:r>
+          </a:p>
+        </p:txBody>
+      </p:sp>
+      <p:sp>
+        <p:nvSpPr>
+          <p:cNvPr id="3" name="Title Placeholder 1">
+            <a:extLst xmlns:a="http://schemas.openxmlformats.org/drawingml/2006/main">
+              <a:ext uri="{FF2B5EF4-FFF2-40B4-BE49-F238E27FC236}">
+                <a16:creationId xmlns:a16="http://schemas.microsoft.com/office/drawing/2014/main" id="{2DF4F548-EDEF-186D-6633-AF1ABC814BC1}"/>
+              </a:ext>
+            </a:extLst>
+          </p:cNvPr>
+          <p:cNvSpPr>
+            <a:spLocks xmlns:a="http://schemas.openxmlformats.org/drawingml/2006/main" noGrp="1"/>
+          </p:cNvSpPr>
+          <p:nvPr>
+            <p:ph type="title" idx="0"/>
+          </p:nvPr>
+        </p:nvSpPr>
+        <p:spPr>
+          <a:prstGeom xmlns:a="http://schemas.openxmlformats.org/drawingml/2006/main" prst="rect">
+            <a:avLst/>
+          </a:prstGeom>
+        </p:spPr>
+        <p:txBody>
+          <a:bodyPr xmlns:a="http://schemas.openxmlformats.org/drawingml/2006/main" vert="horz" lIns="91440" tIns="45720" rIns="91440" bIns="45720" anchor="ctr">
+            <a:normAutofit fontScale="100000"/>
+          </a:bodyPr>
+          <a:lstStyle xmlns:a="http://schemas.openxmlformats.org/drawingml/2006/main"/>
+          <a:p xmlns:a="http://schemas.openxmlformats.org/drawingml/2006/main">
+            <a:r>
+              <a:t>Read more in MAUI documentation</a:t>
+            </a:r>
+            <a:endParaRPr/>
+          </a:p>
+        </p:txBody>
+      </p:sp>
+    </p:spTree>
+    <p:extLst>
+      <p:ext uri="{BB962C8B-B14F-4D97-AF65-F5344CB8AC3E}">
+        <p14:creationId xmlns:p14="http://schemas.microsoft.com/office/powerpoint/2010/main" val="549622578"/>
       </p:ext>
     </p:extLst>
   </p:cSld>
@@ -5504,7 +6007,7 @@
           <p:cNvPr id="2" name="Content Placeholder 2">
             <a:extLst xmlns:a="http://schemas.openxmlformats.org/drawingml/2006/main">
               <a:ext uri="{FF2B5EF4-FFF2-40B4-BE49-F238E27FC236}">
-                <a16:creationId xmlns:a16="http://schemas.microsoft.com/office/drawing/2014/main" id="{09B5024B-0355-49FD-B043-323569B7D3FA}"/>
+                <a16:creationId xmlns:a16="http://schemas.microsoft.com/office/drawing/2014/main" id="{A8260EDC-725B-40CD-BB7B-480C01FE9DD9}"/>
               </a:ext>
             </a:extLst>
           </p:cNvPr>
@@ -5573,7 +6076,7 @@
           <a:lstStyle xmlns:a="http://schemas.openxmlformats.org/drawingml/2006/main"/>
           <a:p xmlns:a="http://schemas.openxmlformats.org/drawingml/2006/main">
             <a:r>
-              <a:t>Exercise overview</a:t>
+              <a:t>What you will build</a:t>
             </a:r>
             <a:endParaRPr/>
           </a:p>
@@ -5582,7 +6085,7 @@
     </p:spTree>
     <p:extLst>
       <p:ext uri="{BB962C8B-B14F-4D97-AF65-F5344CB8AC3E}">
-        <p14:creationId xmlns:p14="http://schemas.microsoft.com/office/powerpoint/2010/main" val="1149502464"/>
+        <p14:creationId xmlns:p14="http://schemas.microsoft.com/office/powerpoint/2010/main" val="387926102"/>
       </p:ext>
     </p:extLst>
   </p:cSld>
@@ -5606,7 +6109,7 @@
           <p:cNvPr id="2" name="Content Placeholder 2">
             <a:extLst xmlns:a="http://schemas.openxmlformats.org/drawingml/2006/main">
               <a:ext uri="{FF2B5EF4-FFF2-40B4-BE49-F238E27FC236}">
-                <a16:creationId xmlns:a16="http://schemas.microsoft.com/office/drawing/2014/main" id="{09B5024B-0355-49FD-B043-323569B7D3FA}"/>
+                <a16:creationId xmlns:a16="http://schemas.microsoft.com/office/drawing/2014/main" id="{A8260EDC-725B-40CD-BB7B-480C01FE9DD9}"/>
               </a:ext>
             </a:extLst>
           </p:cNvPr>
@@ -5626,7 +6129,7 @@
               <a:buNone/>
             </a:pPr>
             <a:r>
-              <a:t>The toolkit generates repeat notification code.</a:t>
+              <a:t>ObservableProperty creates a public notifying property.</a:t>
             </a:r>
           </a:p>
           <a:p xmlns:a="http://schemas.openxmlformats.org/drawingml/2006/main">
@@ -5634,7 +6137,15 @@
               <a:buNone/>
             </a:pPr>
             <a:r>
-              <a:t>It does not choose validation rules.</a:t>
+              <a:t>RelayCommand creates a command from a method.</a:t>
+            </a:r>
+          </a:p>
+          <a:p xmlns:a="http://schemas.openxmlformats.org/drawingml/2006/main">
+            <a:pPr lvl="0">
+              <a:buNone/>
+            </a:pPr>
+            <a:r>
+              <a:t>Your validation rules remain ordinary C# code.</a:t>
             </a:r>
           </a:p>
         </p:txBody>
@@ -5662,21 +6173,49 @@
         </p:spPr>
         <p:txBody>
           <a:bodyPr xmlns:a="http://schemas.openxmlformats.org/drawingml/2006/main" vert="horz" lIns="91440" tIns="45720" rIns="91440" bIns="45720" anchor="ctr">
-            <a:normAutofit fontScale="100000"/>
+            <a:normAutofit fontScale="86250"/>
           </a:bodyPr>
           <a:lstStyle xmlns:a="http://schemas.openxmlformats.org/drawingml/2006/main"/>
           <a:p xmlns:a="http://schemas.openxmlformats.org/drawingml/2006/main">
             <a:r>
-              <a:t>Step 1 Generated plumbing</a:t>
+              <a:t>Source generation removes repeated MVVM code</a:t>
             </a:r>
             <a:endParaRPr/>
           </a:p>
         </p:txBody>
       </p:sp>
+      <p:pic>
+        <p:nvPicPr>
+          <p:cNvPr id="4" name="">
+            <a:extLst xmlns:a="http://schemas.openxmlformats.org/drawingml/2006/main">
+              <a:ext uri="{FF2B5EF4-FFF2-40B4-BE49-F238E27FC236}">
+                <a16:creationId xmlns:a16="http://schemas.microsoft.com/office/drawing/2014/main" id="{D3F89A7D-56F8-4EF4-8676-C572A95C183D}"/>
+              </a:ext>
+            </a:extLst>
+          </p:cNvPr>
+          <p:cNvPicPr>
+            <a:picLocks xmlns:a="http://schemas.openxmlformats.org/drawingml/2006/main" noChangeAspect="1"/>
+          </p:cNvPicPr>
+          <p:nvPr/>
+        </p:nvPicPr>
+        <p:blipFill>
+          <a:blip xmlns:r="http://schemas.openxmlformats.org/officeDocument/2006/relationships" xmlns:a="http://schemas.openxmlformats.org/drawingml/2006/main" r:embed="Rcf1ea3582d7f476a"/>
+          <a:stretch xmlns:a="http://schemas.openxmlformats.org/drawingml/2006/main"/>
+        </p:blipFill>
+        <p:spPr>
+          <a:xfrm xmlns:a="http://schemas.openxmlformats.org/drawingml/2006/main">
+            <a:off x="2667000" y="3800475"/>
+            <a:ext cx="6858000" cy="1828800"/>
+          </a:xfrm>
+          <a:prstGeom xmlns:a="http://schemas.openxmlformats.org/drawingml/2006/main" prst="rect">
+            <a:avLst/>
+          </a:prstGeom>
+        </p:spPr>
+      </p:pic>
     </p:spTree>
     <p:extLst>
       <p:ext uri="{BB962C8B-B14F-4D97-AF65-F5344CB8AC3E}">
-        <p14:creationId xmlns:p14="http://schemas.microsoft.com/office/powerpoint/2010/main" val="757809128"/>
+        <p14:creationId xmlns:p14="http://schemas.microsoft.com/office/powerpoint/2010/main" val="1716253664"/>
       </p:ext>
     </p:extLst>
   </p:cSld>
@@ -5700,7 +6239,7 @@
           <p:cNvPr id="2" name="Content Placeholder 2">
             <a:extLst xmlns:a="http://schemas.openxmlformats.org/drawingml/2006/main">
               <a:ext uri="{FF2B5EF4-FFF2-40B4-BE49-F238E27FC236}">
-                <a16:creationId xmlns:a16="http://schemas.microsoft.com/office/drawing/2014/main" id="{09B5024B-0355-49FD-B043-323569B7D3FA}"/>
+                <a16:creationId xmlns:a16="http://schemas.microsoft.com/office/drawing/2014/main" id="{A8260EDC-725B-40CD-BB7B-480C01FE9DD9}"/>
               </a:ext>
             </a:extLst>
           </p:cNvPr>
@@ -5720,7 +6259,7 @@
               <a:buNone/>
             </a:pPr>
             <a:r>
-              <a:t>The project builds with the package.</a:t>
+              <a:t>The class is partial so generated code can join it.</a:t>
             </a:r>
           </a:p>
           <a:p xmlns:a="http://schemas.openxmlformats.org/drawingml/2006/main">
@@ -5728,7 +6267,15 @@
               <a:buNone/>
             </a:pPr>
             <a:r>
-              <a:t>App behavior stays the same.</a:t>
+              <a:t>A change hook runs when a generated property changes.</a:t>
+            </a:r>
+          </a:p>
+          <a:p xmlns:a="http://schemas.openxmlformats.org/drawingml/2006/main">
+            <a:pPr lvl="0">
+              <a:buNone/>
+            </a:pPr>
+            <a:r>
+              <a:t>NotifyCanExecuteChanged updates a Button state.</a:t>
             </a:r>
           </a:p>
         </p:txBody>
@@ -5761,44 +6308,16 @@
           <a:lstStyle xmlns:a="http://schemas.openxmlformats.org/drawingml/2006/main"/>
           <a:p xmlns:a="http://schemas.openxmlformats.org/drawingml/2006/main">
             <a:r>
-              <a:t>Step 1 Check</a:t>
+              <a:t>From C# to the screen</a:t>
             </a:r>
             <a:endParaRPr/>
           </a:p>
         </p:txBody>
       </p:sp>
-      <p:pic>
-        <p:nvPicPr>
-          <p:cNvPr id="4" name="">
-            <a:extLst xmlns:a="http://schemas.openxmlformats.org/drawingml/2006/main">
-              <a:ext uri="{FF2B5EF4-FFF2-40B4-BE49-F238E27FC236}">
-                <a16:creationId xmlns:a16="http://schemas.microsoft.com/office/drawing/2014/main" id="{4FA57C10-9C6E-43CF-AD40-ADB2EEEE1437}"/>
-              </a:ext>
-            </a:extLst>
-          </p:cNvPr>
-          <p:cNvPicPr>
-            <a:picLocks xmlns:a="http://schemas.openxmlformats.org/drawingml/2006/main" noChangeAspect="1"/>
-          </p:cNvPicPr>
-          <p:nvPr/>
-        </p:nvPicPr>
-        <p:blipFill>
-          <a:blip xmlns:r="http://schemas.openxmlformats.org/officeDocument/2006/relationships" xmlns:a="http://schemas.openxmlformats.org/drawingml/2006/main" r:embed="Rbe606cd722f94d6c"/>
-          <a:stretch xmlns:a="http://schemas.openxmlformats.org/drawingml/2006/main"/>
-        </p:blipFill>
-        <p:spPr>
-          <a:xfrm xmlns:a="http://schemas.openxmlformats.org/drawingml/2006/main">
-            <a:off x="2667000" y="3800475"/>
-            <a:ext cx="6858000" cy="1828800"/>
-          </a:xfrm>
-          <a:prstGeom xmlns:a="http://schemas.openxmlformats.org/drawingml/2006/main" prst="rect">
-            <a:avLst/>
-          </a:prstGeom>
-        </p:spPr>
-      </p:pic>
     </p:spTree>
     <p:extLst>
       <p:ext uri="{BB962C8B-B14F-4D97-AF65-F5344CB8AC3E}">
-        <p14:creationId xmlns:p14="http://schemas.microsoft.com/office/powerpoint/2010/main" val="408549603"/>
+        <p14:creationId xmlns:p14="http://schemas.microsoft.com/office/powerpoint/2010/main" val="1846650173"/>
       </p:ext>
     </p:extLst>
   </p:cSld>
@@ -5822,7 +6341,7 @@
           <p:cNvPr id="2" name="Content Placeholder 2">
             <a:extLst xmlns:a="http://schemas.openxmlformats.org/drawingml/2006/main">
               <a:ext uri="{FF2B5EF4-FFF2-40B4-BE49-F238E27FC236}">
-                <a16:creationId xmlns:a16="http://schemas.microsoft.com/office/drawing/2014/main" id="{09B5024B-0355-49FD-B043-323569B7D3FA}"/>
+                <a16:creationId xmlns:a16="http://schemas.microsoft.com/office/drawing/2014/main" id="{A8260EDC-725B-40CD-BB7B-480C01FE9DD9}"/>
               </a:ext>
             </a:extLst>
           </p:cNvPr>
@@ -5842,7 +6361,7 @@
               <a:buNone/>
             </a:pPr>
             <a:r>
-              <a:t>Mark state for generated properties.</a:t>
+              <a:t>The toolkit generates repeat notification code.</a:t>
             </a:r>
           </a:p>
           <a:p xmlns:a="http://schemas.openxmlformats.org/drawingml/2006/main">
@@ -5850,7 +6369,7 @@
               <a:buNone/>
             </a:pPr>
             <a:r>
-              <a:t>Keep binding names stable.</a:t>
+              <a:t>It does not choose validation rules.</a:t>
             </a:r>
           </a:p>
         </p:txBody>
@@ -5883,7 +6402,7 @@
           <a:lstStyle xmlns:a="http://schemas.openxmlformats.org/drawingml/2006/main"/>
           <a:p xmlns:a="http://schemas.openxmlformats.org/drawingml/2006/main">
             <a:r>
-              <a:t>Step 2 ObservableProperty</a:t>
+              <a:t>Step 1: Generated plumbing</a:t>
             </a:r>
             <a:endParaRPr/>
           </a:p>
@@ -5892,7 +6411,7 @@
     </p:spTree>
     <p:extLst>
       <p:ext uri="{BB962C8B-B14F-4D97-AF65-F5344CB8AC3E}">
-        <p14:creationId xmlns:p14="http://schemas.microsoft.com/office/powerpoint/2010/main" val="451656798"/>
+        <p14:creationId xmlns:p14="http://schemas.microsoft.com/office/powerpoint/2010/main" val="968446307"/>
       </p:ext>
     </p:extLst>
   </p:cSld>
@@ -5916,7 +6435,7 @@
           <p:cNvPr id="2" name="Content Placeholder 2">
             <a:extLst xmlns:a="http://schemas.openxmlformats.org/drawingml/2006/main">
               <a:ext uri="{FF2B5EF4-FFF2-40B4-BE49-F238E27FC236}">
-                <a16:creationId xmlns:a16="http://schemas.microsoft.com/office/drawing/2014/main" id="{09B5024B-0355-49FD-B043-323569B7D3FA}"/>
+                <a16:creationId xmlns:a16="http://schemas.microsoft.com/office/drawing/2014/main" id="{A8260EDC-725B-40CD-BB7B-480C01FE9DD9}"/>
               </a:ext>
             </a:extLst>
           </p:cNvPr>
@@ -5936,7 +6455,7 @@
               <a:buNone/>
             </a:pPr>
             <a:r>
-              <a:t>Typing still updates the form.</a:t>
+              <a:t>The project builds with the package.</a:t>
             </a:r>
           </a:p>
           <a:p xmlns:a="http://schemas.openxmlformats.org/drawingml/2006/main">
@@ -5944,7 +6463,7 @@
               <a:buNone/>
             </a:pPr>
             <a:r>
-              <a:t>The live total still changes.</a:t>
+              <a:t>App behavior stays the same.</a:t>
             </a:r>
           </a:p>
         </p:txBody>
@@ -5977,44 +6496,16 @@
           <a:lstStyle xmlns:a="http://schemas.openxmlformats.org/drawingml/2006/main"/>
           <a:p xmlns:a="http://schemas.openxmlformats.org/drawingml/2006/main">
             <a:r>
-              <a:t>Step 2 Check</a:t>
+              <a:t>Step 1: What changed?</a:t>
             </a:r>
             <a:endParaRPr/>
           </a:p>
         </p:txBody>
       </p:sp>
-      <p:pic>
-        <p:nvPicPr>
-          <p:cNvPr id="4" name="">
-            <a:extLst xmlns:a="http://schemas.openxmlformats.org/drawingml/2006/main">
-              <a:ext uri="{FF2B5EF4-FFF2-40B4-BE49-F238E27FC236}">
-                <a16:creationId xmlns:a16="http://schemas.microsoft.com/office/drawing/2014/main" id="{2309634A-71BF-41C1-AC67-0A128E316279}"/>
-              </a:ext>
-            </a:extLst>
-          </p:cNvPr>
-          <p:cNvPicPr>
-            <a:picLocks xmlns:a="http://schemas.openxmlformats.org/drawingml/2006/main" noChangeAspect="1"/>
-          </p:cNvPicPr>
-          <p:nvPr/>
-        </p:nvPicPr>
-        <p:blipFill>
-          <a:blip xmlns:r="http://schemas.openxmlformats.org/officeDocument/2006/relationships" xmlns:a="http://schemas.openxmlformats.org/drawingml/2006/main" r:embed="R47939aad823445a1"/>
-          <a:stretch xmlns:a="http://schemas.openxmlformats.org/drawingml/2006/main"/>
-        </p:blipFill>
-        <p:spPr>
-          <a:xfrm xmlns:a="http://schemas.openxmlformats.org/drawingml/2006/main">
-            <a:off x="3133823" y="3190875"/>
-            <a:ext cx="5924355" cy="3048000"/>
-          </a:xfrm>
-          <a:prstGeom xmlns:a="http://schemas.openxmlformats.org/drawingml/2006/main" prst="rect">
-            <a:avLst/>
-          </a:prstGeom>
-        </p:spPr>
-      </p:pic>
     </p:spTree>
     <p:extLst>
       <p:ext uri="{BB962C8B-B14F-4D97-AF65-F5344CB8AC3E}">
-        <p14:creationId xmlns:p14="http://schemas.microsoft.com/office/powerpoint/2010/main" val="1087331460"/>
+        <p14:creationId xmlns:p14="http://schemas.microsoft.com/office/powerpoint/2010/main" val="867373511"/>
       </p:ext>
     </p:extLst>
   </p:cSld>
@@ -6038,7 +6529,7 @@
           <p:cNvPr id="2" name="Content Placeholder 2">
             <a:extLst xmlns:a="http://schemas.openxmlformats.org/drawingml/2006/main">
               <a:ext uri="{FF2B5EF4-FFF2-40B4-BE49-F238E27FC236}">
-                <a16:creationId xmlns:a16="http://schemas.microsoft.com/office/drawing/2014/main" id="{09B5024B-0355-49FD-B043-323569B7D3FA}"/>
+                <a16:creationId xmlns:a16="http://schemas.microsoft.com/office/drawing/2014/main" id="{A8260EDC-725B-40CD-BB7B-480C01FE9DD9}"/>
               </a:ext>
             </a:extLst>
           </p:cNvPr>
@@ -6058,7 +6549,7 @@
               <a:buNone/>
             </a:pPr>
             <a:r>
-              <a:t>A generated property can call a change hook.</a:t>
+              <a:t>Mark state for generated properties.</a:t>
             </a:r>
           </a:p>
           <a:p xmlns:a="http://schemas.openxmlformats.org/drawingml/2006/main">
@@ -6066,7 +6557,7 @@
               <a:buNone/>
             </a:pPr>
             <a:r>
-              <a:t>Use hooks to update validation and total.</a:t>
+              <a:t>Keep binding names stable.</a:t>
             </a:r>
           </a:p>
         </p:txBody>
@@ -6099,7 +6590,7 @@
           <a:lstStyle xmlns:a="http://schemas.openxmlformats.org/drawingml/2006/main"/>
           <a:p xmlns:a="http://schemas.openxmlformats.org/drawingml/2006/main">
             <a:r>
-              <a:t>Step 3 Change hooks</a:t>
+              <a:t>Step 2: ObservableProperty</a:t>
             </a:r>
             <a:endParaRPr/>
           </a:p>
@@ -6108,7 +6599,7 @@
     </p:spTree>
     <p:extLst>
       <p:ext uri="{BB962C8B-B14F-4D97-AF65-F5344CB8AC3E}">
-        <p14:creationId xmlns:p14="http://schemas.microsoft.com/office/powerpoint/2010/main" val="189450402"/>
+        <p14:creationId xmlns:p14="http://schemas.microsoft.com/office/powerpoint/2010/main" val="1654760144"/>
       </p:ext>
     </p:extLst>
   </p:cSld>
@@ -6132,7 +6623,7 @@
           <p:cNvPr id="2" name="Content Placeholder 2">
             <a:extLst xmlns:a="http://schemas.openxmlformats.org/drawingml/2006/main">
               <a:ext uri="{FF2B5EF4-FFF2-40B4-BE49-F238E27FC236}">
-                <a16:creationId xmlns:a16="http://schemas.microsoft.com/office/drawing/2014/main" id="{09B5024B-0355-49FD-B043-323569B7D3FA}"/>
+                <a16:creationId xmlns:a16="http://schemas.microsoft.com/office/drawing/2014/main" id="{A8260EDC-725B-40CD-BB7B-480C01FE9DD9}"/>
               </a:ext>
             </a:extLst>
           </p:cNvPr>
@@ -6152,7 +6643,7 @@
               <a:buNone/>
             </a:pPr>
             <a:r>
-              <a:t>A changed input updates the message.</a:t>
+              <a:t>Typing still updates the form.</a:t>
             </a:r>
           </a:p>
           <a:p xmlns:a="http://schemas.openxmlformats.org/drawingml/2006/main">
@@ -6160,7 +6651,7 @@
               <a:buNone/>
             </a:pPr>
             <a:r>
-              <a:t>Submit state follows the input.</a:t>
+              <a:t>The live total still changes.</a:t>
             </a:r>
           </a:p>
         </p:txBody>
@@ -6193,16 +6684,44 @@
           <a:lstStyle xmlns:a="http://schemas.openxmlformats.org/drawingml/2006/main"/>
           <a:p xmlns:a="http://schemas.openxmlformats.org/drawingml/2006/main">
             <a:r>
-              <a:t>Step 3 Check</a:t>
+              <a:t>Step 2: What changed?</a:t>
             </a:r>
             <a:endParaRPr/>
           </a:p>
         </p:txBody>
       </p:sp>
+      <p:pic>
+        <p:nvPicPr>
+          <p:cNvPr id="4" name="">
+            <a:extLst xmlns:a="http://schemas.openxmlformats.org/drawingml/2006/main">
+              <a:ext uri="{FF2B5EF4-FFF2-40B4-BE49-F238E27FC236}">
+                <a16:creationId xmlns:a16="http://schemas.microsoft.com/office/drawing/2014/main" id="{02E1E363-52FB-43A0-9816-5A1551B0C587}"/>
+              </a:ext>
+            </a:extLst>
+          </p:cNvPr>
+          <p:cNvPicPr>
+            <a:picLocks xmlns:a="http://schemas.openxmlformats.org/drawingml/2006/main" noChangeAspect="1"/>
+          </p:cNvPicPr>
+          <p:nvPr/>
+        </p:nvPicPr>
+        <p:blipFill>
+          <a:blip xmlns:r="http://schemas.openxmlformats.org/officeDocument/2006/relationships" xmlns:a="http://schemas.openxmlformats.org/drawingml/2006/main" r:embed="R64bab3fec31a47a5"/>
+          <a:stretch xmlns:a="http://schemas.openxmlformats.org/drawingml/2006/main"/>
+        </p:blipFill>
+        <p:spPr>
+          <a:xfrm xmlns:a="http://schemas.openxmlformats.org/drawingml/2006/main">
+            <a:off x="3133823" y="3190875"/>
+            <a:ext cx="5924355" cy="3048000"/>
+          </a:xfrm>
+          <a:prstGeom xmlns:a="http://schemas.openxmlformats.org/drawingml/2006/main" prst="rect">
+            <a:avLst/>
+          </a:prstGeom>
+        </p:spPr>
+      </p:pic>
     </p:spTree>
     <p:extLst>
       <p:ext uri="{BB962C8B-B14F-4D97-AF65-F5344CB8AC3E}">
-        <p14:creationId xmlns:p14="http://schemas.microsoft.com/office/powerpoint/2010/main" val="2035223908"/>
+        <p14:creationId xmlns:p14="http://schemas.microsoft.com/office/powerpoint/2010/main" val="921945295"/>
       </p:ext>
     </p:extLst>
   </p:cSld>
@@ -6226,7 +6745,7 @@
           <p:cNvPr id="2" name="Content Placeholder 2">
             <a:extLst xmlns:a="http://schemas.openxmlformats.org/drawingml/2006/main">
               <a:ext uri="{FF2B5EF4-FFF2-40B4-BE49-F238E27FC236}">
-                <a16:creationId xmlns:a16="http://schemas.microsoft.com/office/drawing/2014/main" id="{09B5024B-0355-49FD-B043-323569B7D3FA}"/>
+                <a16:creationId xmlns:a16="http://schemas.microsoft.com/office/drawing/2014/main" id="{A8260EDC-725B-40CD-BB7B-480C01FE9DD9}"/>
               </a:ext>
             </a:extLst>
           </p:cNvPr>
@@ -6246,7 +6765,7 @@
               <a:buNone/>
             </a:pPr>
             <a:r>
-              <a:t>Mark an action with RelayCommand.</a:t>
+              <a:t>A generated property can call a change hook.</a:t>
             </a:r>
           </a:p>
           <a:p xmlns:a="http://schemas.openxmlformats.org/drawingml/2006/main">
@@ -6254,7 +6773,7 @@
               <a:buNone/>
             </a:pPr>
             <a:r>
-              <a:t>The toolkit generates the command property.</a:t>
+              <a:t>Use hooks to update validation and total.</a:t>
             </a:r>
           </a:p>
         </p:txBody>
@@ -6287,7 +6806,7 @@
           <a:lstStyle xmlns:a="http://schemas.openxmlformats.org/drawingml/2006/main"/>
           <a:p xmlns:a="http://schemas.openxmlformats.org/drawingml/2006/main">
             <a:r>
-              <a:t>Step 4 RelayCommand</a:t>
+              <a:t>Step 3: Change hooks</a:t>
             </a:r>
             <a:endParaRPr/>
           </a:p>
@@ -6296,7 +6815,7 @@
     </p:spTree>
     <p:extLst>
       <p:ext uri="{BB962C8B-B14F-4D97-AF65-F5344CB8AC3E}">
-        <p14:creationId xmlns:p14="http://schemas.microsoft.com/office/powerpoint/2010/main" val="1229525622"/>
+        <p14:creationId xmlns:p14="http://schemas.microsoft.com/office/powerpoint/2010/main" val="1582146067"/>
       </p:ext>
     </p:extLst>
   </p:cSld>
